--- a/Final/Figures/wavepacket2.pptx
+++ b/Final/Figures/wavepacket2.pptx
@@ -5,12 +5,12 @@
     <p:sldMasterId id="2147483696" r:id="rId1"/>
   </p:sldMasterIdLst>
   <p:sldIdLst>
-    <p:sldId id="256" r:id="rId2"/>
-    <p:sldId id="260" r:id="rId3"/>
-    <p:sldId id="266" r:id="rId4"/>
-    <p:sldId id="267" r:id="rId5"/>
-    <p:sldId id="268" r:id="rId6"/>
-    <p:sldId id="273" r:id="rId7"/>
+    <p:sldId id="260" r:id="rId2"/>
+    <p:sldId id="266" r:id="rId3"/>
+    <p:sldId id="267" r:id="rId4"/>
+    <p:sldId id="268" r:id="rId5"/>
+    <p:sldId id="273" r:id="rId6"/>
+    <p:sldId id="256" r:id="rId7"/>
     <p:sldId id="269" r:id="rId8"/>
     <p:sldId id="270" r:id="rId9"/>
     <p:sldId id="271" r:id="rId10"/>
@@ -252,7 +252,7 @@
           <a:p>
             <a:fld id="{B4A272A4-1B6B-4C0A-B74D-70EF2D8C7D55}" type="datetimeFigureOut">
               <a:rPr lang="zh-TW" altLang="en-US" smtClean="0"/>
-              <a:t>2026/5/26</a:t>
+              <a:t>2026/7/1</a:t>
             </a:fld>
             <a:endParaRPr lang="zh-TW" altLang="en-US"/>
           </a:p>
@@ -422,7 +422,7 @@
           <a:p>
             <a:fld id="{B4A272A4-1B6B-4C0A-B74D-70EF2D8C7D55}" type="datetimeFigureOut">
               <a:rPr lang="zh-TW" altLang="en-US" smtClean="0"/>
-              <a:t>2026/5/26</a:t>
+              <a:t>2026/7/1</a:t>
             </a:fld>
             <a:endParaRPr lang="zh-TW" altLang="en-US"/>
           </a:p>
@@ -602,7 +602,7 @@
           <a:p>
             <a:fld id="{B4A272A4-1B6B-4C0A-B74D-70EF2D8C7D55}" type="datetimeFigureOut">
               <a:rPr lang="zh-TW" altLang="en-US" smtClean="0"/>
-              <a:t>2026/5/26</a:t>
+              <a:t>2026/7/1</a:t>
             </a:fld>
             <a:endParaRPr lang="zh-TW" altLang="en-US"/>
           </a:p>
@@ -772,7 +772,7 @@
           <a:p>
             <a:fld id="{B4A272A4-1B6B-4C0A-B74D-70EF2D8C7D55}" type="datetimeFigureOut">
               <a:rPr lang="zh-TW" altLang="en-US" smtClean="0"/>
-              <a:t>2026/5/26</a:t>
+              <a:t>2026/7/1</a:t>
             </a:fld>
             <a:endParaRPr lang="zh-TW" altLang="en-US"/>
           </a:p>
@@ -1018,7 +1018,7 @@
           <a:p>
             <a:fld id="{B4A272A4-1B6B-4C0A-B74D-70EF2D8C7D55}" type="datetimeFigureOut">
               <a:rPr lang="zh-TW" altLang="en-US" smtClean="0"/>
-              <a:t>2026/5/26</a:t>
+              <a:t>2026/7/1</a:t>
             </a:fld>
             <a:endParaRPr lang="zh-TW" altLang="en-US"/>
           </a:p>
@@ -1250,7 +1250,7 @@
           <a:p>
             <a:fld id="{B4A272A4-1B6B-4C0A-B74D-70EF2D8C7D55}" type="datetimeFigureOut">
               <a:rPr lang="zh-TW" altLang="en-US" smtClean="0"/>
-              <a:t>2026/5/26</a:t>
+              <a:t>2026/7/1</a:t>
             </a:fld>
             <a:endParaRPr lang="zh-TW" altLang="en-US"/>
           </a:p>
@@ -1617,7 +1617,7 @@
           <a:p>
             <a:fld id="{B4A272A4-1B6B-4C0A-B74D-70EF2D8C7D55}" type="datetimeFigureOut">
               <a:rPr lang="zh-TW" altLang="en-US" smtClean="0"/>
-              <a:t>2026/5/26</a:t>
+              <a:t>2026/7/1</a:t>
             </a:fld>
             <a:endParaRPr lang="zh-TW" altLang="en-US"/>
           </a:p>
@@ -1735,7 +1735,7 @@
           <a:p>
             <a:fld id="{B4A272A4-1B6B-4C0A-B74D-70EF2D8C7D55}" type="datetimeFigureOut">
               <a:rPr lang="zh-TW" altLang="en-US" smtClean="0"/>
-              <a:t>2026/5/26</a:t>
+              <a:t>2026/7/1</a:t>
             </a:fld>
             <a:endParaRPr lang="zh-TW" altLang="en-US"/>
           </a:p>
@@ -1830,7 +1830,7 @@
           <a:p>
             <a:fld id="{B4A272A4-1B6B-4C0A-B74D-70EF2D8C7D55}" type="datetimeFigureOut">
               <a:rPr lang="zh-TW" altLang="en-US" smtClean="0"/>
-              <a:t>2026/5/26</a:t>
+              <a:t>2026/7/1</a:t>
             </a:fld>
             <a:endParaRPr lang="zh-TW" altLang="en-US"/>
           </a:p>
@@ -2107,7 +2107,7 @@
           <a:p>
             <a:fld id="{B4A272A4-1B6B-4C0A-B74D-70EF2D8C7D55}" type="datetimeFigureOut">
               <a:rPr lang="zh-TW" altLang="en-US" smtClean="0"/>
-              <a:t>2026/5/26</a:t>
+              <a:t>2026/7/1</a:t>
             </a:fld>
             <a:endParaRPr lang="zh-TW" altLang="en-US"/>
           </a:p>
@@ -2364,7 +2364,7 @@
           <a:p>
             <a:fld id="{B4A272A4-1B6B-4C0A-B74D-70EF2D8C7D55}" type="datetimeFigureOut">
               <a:rPr lang="zh-TW" altLang="en-US" smtClean="0"/>
-              <a:t>2026/5/26</a:t>
+              <a:t>2026/7/1</a:t>
             </a:fld>
             <a:endParaRPr lang="zh-TW" altLang="en-US"/>
           </a:p>
@@ -2577,7 +2577,7 @@
           <a:p>
             <a:fld id="{B4A272A4-1B6B-4C0A-B74D-70EF2D8C7D55}" type="datetimeFigureOut">
               <a:rPr lang="zh-TW" altLang="en-US" smtClean="0"/>
-              <a:t>2026/5/26</a:t>
+              <a:t>2026/7/1</a:t>
             </a:fld>
             <a:endParaRPr lang="zh-TW" altLang="en-US"/>
           </a:p>
@@ -2966,1960 +2966,6 @@
 </file>
 
 <file path=ppt/slides/slide1.xml><?xml version="1.0" encoding="utf-8"?>
-<p:sld xmlns:a="http://schemas.openxmlformats.org/drawingml/2006/main" xmlns:r="http://schemas.openxmlformats.org/officeDocument/2006/relationships" xmlns:p="http://schemas.openxmlformats.org/presentationml/2006/main" show="0">
-  <p:cSld>
-    <p:spTree>
-      <p:nvGrpSpPr>
-        <p:cNvPr id="1" name=""/>
-        <p:cNvGrpSpPr/>
-        <p:nvPr/>
-      </p:nvGrpSpPr>
-      <p:grpSpPr>
-        <a:xfrm>
-          <a:off x="0" y="0"/>
-          <a:ext cx="0" cy="0"/>
-          <a:chOff x="0" y="0"/>
-          <a:chExt cx="0" cy="0"/>
-        </a:xfrm>
-      </p:grpSpPr>
-      <p:sp>
-        <p:nvSpPr>
-          <p:cNvPr id="36" name="矩形: 圓角 35">
-            <a:extLst>
-              <a:ext uri="{FF2B5EF4-FFF2-40B4-BE49-F238E27FC236}">
-                <a16:creationId xmlns:a16="http://schemas.microsoft.com/office/drawing/2014/main" id="{E60C8961-39A3-406D-BBF9-2931EAC49EEF}"/>
-              </a:ext>
-            </a:extLst>
-          </p:cNvPr>
-          <p:cNvSpPr/>
-          <p:nvPr/>
-        </p:nvSpPr>
-        <p:spPr>
-          <a:xfrm>
-            <a:off x="2723646" y="29601"/>
-            <a:ext cx="4458717" cy="1741367"/>
-          </a:xfrm>
-          <a:prstGeom prst="roundRect">
-            <a:avLst>
-              <a:gd name="adj" fmla="val 4125"/>
-            </a:avLst>
-          </a:prstGeom>
-          <a:gradFill flip="none" rotWithShape="1">
-            <a:gsLst>
-              <a:gs pos="0">
-                <a:schemeClr val="bg1">
-                  <a:lumMod val="95000"/>
-                </a:schemeClr>
-              </a:gs>
-              <a:gs pos="100000">
-                <a:schemeClr val="bg1">
-                  <a:lumMod val="95000"/>
-                </a:schemeClr>
-              </a:gs>
-            </a:gsLst>
-            <a:lin ang="5400000" scaled="1"/>
-            <a:tileRect/>
-          </a:gradFill>
-        </p:spPr>
-        <p:style>
-          <a:lnRef idx="1">
-            <a:schemeClr val="accent3"/>
-          </a:lnRef>
-          <a:fillRef idx="2">
-            <a:schemeClr val="accent3"/>
-          </a:fillRef>
-          <a:effectRef idx="1">
-            <a:schemeClr val="accent3"/>
-          </a:effectRef>
-          <a:fontRef idx="minor">
-            <a:schemeClr val="dk1"/>
-          </a:fontRef>
-        </p:style>
-        <p:txBody>
-          <a:bodyPr rot="0" spcFirstLastPara="0" vertOverflow="overflow" horzOverflow="overflow" vert="horz" wrap="square" lIns="37158" tIns="18579" rIns="37158" bIns="18579" numCol="1" spcCol="0" rtlCol="0" fromWordArt="0" anchor="ctr" anchorCtr="0" forceAA="0" compatLnSpc="1">
-            <a:prstTxWarp prst="textNoShape">
-              <a:avLst/>
-            </a:prstTxWarp>
-            <a:noAutofit/>
-          </a:bodyPr>
-          <a:lstStyle/>
-          <a:p>
-            <a:pPr algn="ctr"/>
-            <a:endParaRPr lang="zh-TW" altLang="en-US" sz="731" dirty="0">
-              <a:latin typeface="Times New Roman" panose="02020603050405020304" pitchFamily="18" charset="0"/>
-              <a:cs typeface="Times New Roman" panose="02020603050405020304" pitchFamily="18" charset="0"/>
-            </a:endParaRPr>
-          </a:p>
-        </p:txBody>
-      </p:sp>
-      <p:pic>
-        <p:nvPicPr>
-          <p:cNvPr id="12" name="圖片 11">
-            <a:extLst>
-              <a:ext uri="{FF2B5EF4-FFF2-40B4-BE49-F238E27FC236}">
-                <a16:creationId xmlns:a16="http://schemas.microsoft.com/office/drawing/2014/main" id="{CF4C0578-88F8-42BB-B9E4-F95E516E2655}"/>
-              </a:ext>
-            </a:extLst>
-          </p:cNvPr>
-          <p:cNvPicPr>
-            <a:picLocks noChangeAspect="1"/>
-          </p:cNvPicPr>
-          <p:nvPr/>
-        </p:nvPicPr>
-        <p:blipFill rotWithShape="1">
-          <a:blip r:embed="rId2">
-            <a:clrChange>
-              <a:clrFrom>
-                <a:srgbClr val="FFFFFF"/>
-              </a:clrFrom>
-              <a:clrTo>
-                <a:srgbClr val="FFFFFF">
-                  <a:alpha val="0"/>
-                </a:srgbClr>
-              </a:clrTo>
-            </a:clrChange>
-            <a:extLst>
-              <a:ext uri="{28A0092B-C50C-407E-A947-70E740481C1C}">
-                <a14:useLocalDpi xmlns:a14="http://schemas.microsoft.com/office/drawing/2010/main" val="0"/>
-              </a:ext>
-            </a:extLst>
-          </a:blip>
-          <a:srcRect l="9861" t="11602" r="1805" b="64731"/>
-          <a:stretch/>
-        </p:blipFill>
-        <p:spPr>
-          <a:xfrm>
-            <a:off x="5136894" y="62765"/>
-            <a:ext cx="2019301" cy="1623060"/>
-          </a:xfrm>
-          <a:prstGeom prst="rect">
-            <a:avLst/>
-          </a:prstGeom>
-        </p:spPr>
-      </p:pic>
-      <mc:AlternateContent xmlns:mc="http://schemas.openxmlformats.org/markup-compatibility/2006">
-        <mc:Choice xmlns:a14="http://schemas.microsoft.com/office/drawing/2010/main" Requires="a14">
-          <p:sp>
-            <p:nvSpPr>
-              <p:cNvPr id="38" name="矩形 37">
-                <a:extLst>
-                  <a:ext uri="{FF2B5EF4-FFF2-40B4-BE49-F238E27FC236}">
-                    <a16:creationId xmlns:a16="http://schemas.microsoft.com/office/drawing/2014/main" id="{ED99895A-7756-4CEE-A914-73F36DFFCE5B}"/>
-                  </a:ext>
-                </a:extLst>
-              </p:cNvPr>
-              <p:cNvSpPr/>
-              <p:nvPr/>
-            </p:nvSpPr>
-            <p:spPr>
-              <a:xfrm>
-                <a:off x="3261312" y="608417"/>
-                <a:ext cx="1892249" cy="500522"/>
-              </a:xfrm>
-              <a:prstGeom prst="rect">
-                <a:avLst/>
-              </a:prstGeom>
-            </p:spPr>
-            <p:txBody>
-              <a:bodyPr wrap="none">
-                <a:spAutoFit/>
-              </a:bodyPr>
-              <a:lstStyle/>
-              <a:p>
-                <a:pPr algn="r"/>
-                <a14:m>
-                  <m:oMathPara xmlns:m="http://schemas.openxmlformats.org/officeDocument/2006/math">
-                    <m:oMathParaPr>
-                      <m:jc m:val="centerGroup"/>
-                    </m:oMathParaPr>
-                    <m:oMath xmlns:m="http://schemas.openxmlformats.org/officeDocument/2006/math">
-                      <m:sSup>
-                        <m:sSupPr>
-                          <m:ctrlPr>
-                            <a:rPr lang="en-US" altLang="zh-TW" sz="2000" b="1" i="1" smtClean="0">
-                              <a:latin typeface="Cambria Math" panose="02040503050406030204" pitchFamily="18" charset="0"/>
-                            </a:rPr>
-                          </m:ctrlPr>
-                        </m:sSupPr>
-                        <m:e>
-                          <m:d>
-                            <m:dPr>
-                              <m:begChr m:val="|"/>
-                              <m:endChr m:val="|"/>
-                              <m:ctrlPr>
-                                <a:rPr lang="en-US" altLang="zh-TW" sz="2000" b="1" i="1">
-                                  <a:latin typeface="Cambria Math" panose="02040503050406030204" pitchFamily="18" charset="0"/>
-                                </a:rPr>
-                              </m:ctrlPr>
-                            </m:dPr>
-                            <m:e>
-                              <m:sSub>
-                                <m:sSubPr>
-                                  <m:ctrlPr>
-                                    <a:rPr lang="en-US" altLang="zh-TW" sz="2000" i="1" dirty="0">
-                                      <a:latin typeface="Cambria Math" panose="02040503050406030204" pitchFamily="18" charset="0"/>
-                                    </a:rPr>
-                                  </m:ctrlPr>
-                                </m:sSubPr>
-                                <m:e>
-                                  <m:acc>
-                                    <m:accPr>
-                                      <m:chr m:val="̃"/>
-                                      <m:ctrlPr>
-                                        <a:rPr lang="en-US" altLang="zh-TW" sz="2000" i="1">
-                                          <a:latin typeface="Cambria Math" panose="02040503050406030204" pitchFamily="18" charset="0"/>
-                                        </a:rPr>
-                                      </m:ctrlPr>
-                                    </m:accPr>
-                                    <m:e>
-                                      <m:r>
-                                        <a:rPr lang="en-US" altLang="zh-TW" sz="2000" i="1">
-                                          <a:latin typeface="Cambria Math" panose="02040503050406030204" pitchFamily="18" charset="0"/>
-                                        </a:rPr>
-                                        <m:t>𝐹</m:t>
-                                      </m:r>
-                                    </m:e>
-                                  </m:acc>
-                                </m:e>
-                                <m:sub>
-                                  <m:r>
-                                    <a:rPr lang="en-US" altLang="zh-TW" sz="2000" b="0" i="1" smtClean="0">
-                                      <a:latin typeface="Cambria Math" panose="02040503050406030204" pitchFamily="18" charset="0"/>
-                                    </a:rPr>
-                                    <m:t>1</m:t>
-                                  </m:r>
-                                  <m:r>
-                                    <a:rPr lang="en-US" altLang="zh-TW" sz="2000" i="1" dirty="0">
-                                      <a:latin typeface="Cambria Math" panose="02040503050406030204" pitchFamily="18" charset="0"/>
-                                    </a:rPr>
-                                    <m:t>,0</m:t>
-                                  </m:r>
-                                </m:sub>
-                              </m:sSub>
-                              <m:d>
-                                <m:dPr>
-                                  <m:ctrlPr>
-                                    <a:rPr lang="en-US" altLang="zh-TW" sz="2000" i="1" dirty="0">
-                                      <a:latin typeface="Cambria Math" panose="02040503050406030204" pitchFamily="18" charset="0"/>
-                                    </a:rPr>
-                                  </m:ctrlPr>
-                                </m:dPr>
-                                <m:e>
-                                  <m:r>
-                                    <a:rPr lang="en-US" altLang="zh-TW" sz="2000" b="1" i="1">
-                                      <a:latin typeface="Cambria Math" panose="02040503050406030204" pitchFamily="18" charset="0"/>
-                                    </a:rPr>
-                                    <m:t>𝑸</m:t>
-                                  </m:r>
-                                </m:e>
-                              </m:d>
-                              <m:sSup>
-                                <m:sSupPr>
-                                  <m:ctrlPr>
-                                    <a:rPr lang="en-US" altLang="zh-TW" sz="2000" i="1" dirty="0">
-                                      <a:latin typeface="Cambria Math" panose="02040503050406030204" pitchFamily="18" charset="0"/>
-                                    </a:rPr>
-                                  </m:ctrlPr>
-                                </m:sSupPr>
-                                <m:e>
-                                  <m:r>
-                                    <a:rPr lang="en-US" altLang="zh-TW" sz="2000" i="1" dirty="0">
-                                      <a:latin typeface="Cambria Math" panose="02040503050406030204" pitchFamily="18" charset="0"/>
-                                    </a:rPr>
-                                    <m:t>𝑒</m:t>
-                                  </m:r>
-                                </m:e>
-                                <m:sup>
-                                  <m:r>
-                                    <a:rPr lang="en-US" altLang="zh-TW" sz="2000" i="1" dirty="0">
-                                      <a:latin typeface="Cambria Math" panose="02040503050406030204" pitchFamily="18" charset="0"/>
-                                    </a:rPr>
-                                    <m:t>𝑖</m:t>
-                                  </m:r>
-                                  <m:r>
-                                    <a:rPr lang="en-US" altLang="zh-TW" sz="2000" i="1" dirty="0">
-                                      <a:latin typeface="Cambria Math" panose="02040503050406030204" pitchFamily="18" charset="0"/>
-                                    </a:rPr>
-                                    <m:t>ℓ</m:t>
-                                  </m:r>
-                                  <m:sSub>
-                                    <m:sSubPr>
-                                      <m:ctrlPr>
-                                        <a:rPr lang="en-US" altLang="zh-TW" sz="2000" i="1" dirty="0">
-                                          <a:latin typeface="Cambria Math" panose="02040503050406030204" pitchFamily="18" charset="0"/>
-                                        </a:rPr>
-                                      </m:ctrlPr>
-                                    </m:sSubPr>
-                                    <m:e>
-                                      <m:r>
-                                        <a:rPr lang="en-US" altLang="zh-TW" sz="2000" i="1" dirty="0">
-                                          <a:latin typeface="Cambria Math" panose="02040503050406030204" pitchFamily="18" charset="0"/>
-                                        </a:rPr>
-                                        <m:t>𝜙</m:t>
-                                      </m:r>
-                                    </m:e>
-                                    <m:sub>
-                                      <m:r>
-                                        <a:rPr lang="en-US" altLang="zh-TW" sz="2000" b="1" i="1" dirty="0">
-                                          <a:latin typeface="Cambria Math" panose="02040503050406030204" pitchFamily="18" charset="0"/>
-                                        </a:rPr>
-                                        <m:t>𝑸</m:t>
-                                      </m:r>
-                                    </m:sub>
-                                  </m:sSub>
-                                </m:sup>
-                              </m:sSup>
-                            </m:e>
-                          </m:d>
-                        </m:e>
-                        <m:sup>
-                          <m:r>
-                            <a:rPr lang="en-US" altLang="zh-TW" sz="2000" i="1">
-                              <a:latin typeface="Cambria Math" panose="02040503050406030204" pitchFamily="18" charset="0"/>
-                            </a:rPr>
-                            <m:t>2</m:t>
-                          </m:r>
-                        </m:sup>
-                      </m:sSup>
-                    </m:oMath>
-                  </m:oMathPara>
-                </a14:m>
-                <a:endParaRPr lang="zh-TW" altLang="en-US" sz="2000" dirty="0"/>
-              </a:p>
-            </p:txBody>
-          </p:sp>
-        </mc:Choice>
-        <mc:Fallback>
-          <p:sp>
-            <p:nvSpPr>
-              <p:cNvPr id="38" name="矩形 37">
-                <a:extLst>
-                  <a:ext uri="{FF2B5EF4-FFF2-40B4-BE49-F238E27FC236}">
-                    <a16:creationId xmlns:a16="http://schemas.microsoft.com/office/drawing/2014/main" id="{ED99895A-7756-4CEE-A914-73F36DFFCE5B}"/>
-                  </a:ext>
-                </a:extLst>
-              </p:cNvPr>
-              <p:cNvSpPr>
-                <a:spLocks noRot="1" noChangeAspect="1" noMove="1" noResize="1" noEditPoints="1" noAdjustHandles="1" noChangeArrowheads="1" noChangeShapeType="1" noTextEdit="1"/>
-              </p:cNvSpPr>
-              <p:nvPr/>
-            </p:nvSpPr>
-            <p:spPr>
-              <a:xfrm>
-                <a:off x="3261312" y="608417"/>
-                <a:ext cx="1892249" cy="500522"/>
-              </a:xfrm>
-              <a:prstGeom prst="rect">
-                <a:avLst/>
-              </a:prstGeom>
-              <a:blipFill>
-                <a:blip r:embed="rId3"/>
-                <a:stretch>
-                  <a:fillRect/>
-                </a:stretch>
-              </a:blipFill>
-            </p:spPr>
-            <p:txBody>
-              <a:bodyPr/>
-              <a:lstStyle/>
-              <a:p>
-                <a:r>
-                  <a:rPr lang="zh-TW" altLang="en-US">
-                    <a:noFill/>
-                  </a:rPr>
-                  <a:t> </a:t>
-                </a:r>
-              </a:p>
-            </p:txBody>
-          </p:sp>
-        </mc:Fallback>
-      </mc:AlternateContent>
-      <mc:AlternateContent xmlns:mc="http://schemas.openxmlformats.org/markup-compatibility/2006">
-        <mc:Choice xmlns:a14="http://schemas.microsoft.com/office/drawing/2010/main" Requires="a14">
-          <p:sp>
-            <p:nvSpPr>
-              <p:cNvPr id="39" name="文字方塊 38">
-                <a:extLst>
-                  <a:ext uri="{FF2B5EF4-FFF2-40B4-BE49-F238E27FC236}">
-                    <a16:creationId xmlns:a16="http://schemas.microsoft.com/office/drawing/2014/main" id="{B2DDAB2F-1594-4FFB-83A0-D06118A518FB}"/>
-                  </a:ext>
-                </a:extLst>
-              </p:cNvPr>
-              <p:cNvSpPr txBox="1"/>
-              <p:nvPr/>
-            </p:nvSpPr>
-            <p:spPr>
-              <a:xfrm>
-                <a:off x="5092380" y="1205477"/>
-                <a:ext cx="830594" cy="400110"/>
-              </a:xfrm>
-              <a:prstGeom prst="rect">
-                <a:avLst/>
-              </a:prstGeom>
-              <a:noFill/>
-            </p:spPr>
-            <p:txBody>
-              <a:bodyPr wrap="square" rtlCol="0">
-                <a:spAutoFit/>
-              </a:bodyPr>
-              <a:lstStyle/>
-              <a:p>
-                <a:pPr/>
-                <a14:m>
-                  <m:oMathPara xmlns:m="http://schemas.openxmlformats.org/officeDocument/2006/math">
-                    <m:oMathParaPr>
-                      <m:jc m:val="centerGroup"/>
-                    </m:oMathParaPr>
-                    <m:oMath xmlns:m="http://schemas.openxmlformats.org/officeDocument/2006/math">
-                      <m:sSub>
-                        <m:sSubPr>
-                          <m:ctrlPr>
-                            <a:rPr lang="en-US" altLang="zh-TW" sz="2000" i="1">
-                              <a:latin typeface="Cambria Math" panose="02040503050406030204" pitchFamily="18" charset="0"/>
-                            </a:rPr>
-                          </m:ctrlPr>
-                        </m:sSubPr>
-                        <m:e>
-                          <m:r>
-                            <a:rPr lang="en-US" altLang="zh-TW" sz="2000" i="1">
-                              <a:latin typeface="Cambria Math" panose="02040503050406030204" pitchFamily="18" charset="0"/>
-                            </a:rPr>
-                            <m:t>0.1</m:t>
-                          </m:r>
-                          <m:r>
-                            <a:rPr lang="en-US" altLang="zh-TW" sz="2000" i="1">
-                              <a:latin typeface="Cambria Math" panose="02040503050406030204" pitchFamily="18" charset="0"/>
-                            </a:rPr>
-                            <m:t>𝑄</m:t>
-                          </m:r>
-                        </m:e>
-                        <m:sub>
-                          <m:r>
-                            <a:rPr lang="en-US" altLang="zh-TW" sz="2000" i="1">
-                              <a:latin typeface="Cambria Math" panose="02040503050406030204" pitchFamily="18" charset="0"/>
-                            </a:rPr>
-                            <m:t>𝑐</m:t>
-                          </m:r>
-                        </m:sub>
-                      </m:sSub>
-                    </m:oMath>
-                  </m:oMathPara>
-                </a14:m>
-                <a:endParaRPr lang="en-US" altLang="zh-TW" sz="2000" dirty="0"/>
-              </a:p>
-            </p:txBody>
-          </p:sp>
-        </mc:Choice>
-        <mc:Fallback>
-          <p:sp>
-            <p:nvSpPr>
-              <p:cNvPr id="39" name="文字方塊 38">
-                <a:extLst>
-                  <a:ext uri="{FF2B5EF4-FFF2-40B4-BE49-F238E27FC236}">
-                    <a16:creationId xmlns:a16="http://schemas.microsoft.com/office/drawing/2014/main" id="{B2DDAB2F-1594-4FFB-83A0-D06118A518FB}"/>
-                  </a:ext>
-                </a:extLst>
-              </p:cNvPr>
-              <p:cNvSpPr txBox="1">
-                <a:spLocks noRot="1" noChangeAspect="1" noMove="1" noResize="1" noEditPoints="1" noAdjustHandles="1" noChangeArrowheads="1" noChangeShapeType="1" noTextEdit="1"/>
-              </p:cNvSpPr>
-              <p:nvPr/>
-            </p:nvSpPr>
-            <p:spPr>
-              <a:xfrm>
-                <a:off x="5092380" y="1205477"/>
-                <a:ext cx="830594" cy="400110"/>
-              </a:xfrm>
-              <a:prstGeom prst="rect">
-                <a:avLst/>
-              </a:prstGeom>
-              <a:blipFill>
-                <a:blip r:embed="rId4"/>
-                <a:stretch>
-                  <a:fillRect b="-9231"/>
-                </a:stretch>
-              </a:blipFill>
-            </p:spPr>
-            <p:txBody>
-              <a:bodyPr/>
-              <a:lstStyle/>
-              <a:p>
-                <a:r>
-                  <a:rPr lang="zh-TW" altLang="en-US">
-                    <a:noFill/>
-                  </a:rPr>
-                  <a:t> </a:t>
-                </a:r>
-              </a:p>
-            </p:txBody>
-          </p:sp>
-        </mc:Fallback>
-      </mc:AlternateContent>
-      <p:sp>
-        <p:nvSpPr>
-          <p:cNvPr id="40" name="箭號: 向右 39">
-            <a:extLst>
-              <a:ext uri="{FF2B5EF4-FFF2-40B4-BE49-F238E27FC236}">
-                <a16:creationId xmlns:a16="http://schemas.microsoft.com/office/drawing/2014/main" id="{3B26685E-3A51-45E8-BCF7-50D246C56B01}"/>
-              </a:ext>
-            </a:extLst>
-          </p:cNvPr>
-          <p:cNvSpPr/>
-          <p:nvPr/>
-        </p:nvSpPr>
-        <p:spPr>
-          <a:xfrm>
-            <a:off x="5923011" y="857760"/>
-            <a:ext cx="122846" cy="35583"/>
-          </a:xfrm>
-          <a:prstGeom prst="rightArrow">
-            <a:avLst>
-              <a:gd name="adj1" fmla="val 50000"/>
-              <a:gd name="adj2" fmla="val 99023"/>
-            </a:avLst>
-          </a:prstGeom>
-          <a:solidFill>
-            <a:schemeClr val="tx1"/>
-          </a:solidFill>
-          <a:ln>
-            <a:solidFill>
-              <a:schemeClr val="tx1"/>
-            </a:solidFill>
-          </a:ln>
-        </p:spPr>
-        <p:style>
-          <a:lnRef idx="2">
-            <a:schemeClr val="dk1">
-              <a:shade val="50000"/>
-            </a:schemeClr>
-          </a:lnRef>
-          <a:fillRef idx="1">
-            <a:schemeClr val="dk1"/>
-          </a:fillRef>
-          <a:effectRef idx="0">
-            <a:schemeClr val="dk1"/>
-          </a:effectRef>
-          <a:fontRef idx="minor">
-            <a:schemeClr val="lt1"/>
-          </a:fontRef>
-        </p:style>
-        <p:txBody>
-          <a:bodyPr rtlCol="0" anchor="ctr"/>
-          <a:lstStyle/>
-          <a:p>
-            <a:pPr algn="ctr"/>
-            <a:endParaRPr lang="zh-TW" altLang="en-US" sz="2000">
-              <a:solidFill>
-                <a:schemeClr val="tx1"/>
-              </a:solidFill>
-            </a:endParaRPr>
-          </a:p>
-        </p:txBody>
-      </p:sp>
-      <p:sp>
-        <p:nvSpPr>
-          <p:cNvPr id="41" name="箭號: 向右 40">
-            <a:extLst>
-              <a:ext uri="{FF2B5EF4-FFF2-40B4-BE49-F238E27FC236}">
-                <a16:creationId xmlns:a16="http://schemas.microsoft.com/office/drawing/2014/main" id="{7EF8F9B9-3935-41B7-A75F-315D7FC4CED0}"/>
-              </a:ext>
-            </a:extLst>
-          </p:cNvPr>
-          <p:cNvSpPr/>
-          <p:nvPr/>
-        </p:nvSpPr>
-        <p:spPr>
-          <a:xfrm rot="16200000">
-            <a:off x="5871636" y="806243"/>
-            <a:ext cx="118561" cy="36869"/>
-          </a:xfrm>
-          <a:prstGeom prst="rightArrow">
-            <a:avLst>
-              <a:gd name="adj1" fmla="val 50000"/>
-              <a:gd name="adj2" fmla="val 99023"/>
-            </a:avLst>
-          </a:prstGeom>
-          <a:solidFill>
-            <a:schemeClr val="tx1"/>
-          </a:solidFill>
-          <a:ln>
-            <a:solidFill>
-              <a:schemeClr val="tx1"/>
-            </a:solidFill>
-          </a:ln>
-        </p:spPr>
-        <p:style>
-          <a:lnRef idx="2">
-            <a:schemeClr val="dk1">
-              <a:shade val="50000"/>
-            </a:schemeClr>
-          </a:lnRef>
-          <a:fillRef idx="1">
-            <a:schemeClr val="dk1"/>
-          </a:fillRef>
-          <a:effectRef idx="0">
-            <a:schemeClr val="dk1"/>
-          </a:effectRef>
-          <a:fontRef idx="minor">
-            <a:schemeClr val="lt1"/>
-          </a:fontRef>
-        </p:style>
-        <p:txBody>
-          <a:bodyPr rtlCol="0" anchor="ctr"/>
-          <a:lstStyle/>
-          <a:p>
-            <a:pPr algn="ctr"/>
-            <a:endParaRPr lang="zh-TW" altLang="en-US" sz="2000" dirty="0">
-              <a:solidFill>
-                <a:schemeClr val="tx1"/>
-              </a:solidFill>
-            </a:endParaRPr>
-          </a:p>
-        </p:txBody>
-      </p:sp>
-      <mc:AlternateContent xmlns:mc="http://schemas.openxmlformats.org/markup-compatibility/2006">
-        <mc:Choice xmlns:a14="http://schemas.microsoft.com/office/drawing/2010/main" Requires="a14">
-          <p:sp>
-            <p:nvSpPr>
-              <p:cNvPr id="42" name="文字方塊 41">
-                <a:extLst>
-                  <a:ext uri="{FF2B5EF4-FFF2-40B4-BE49-F238E27FC236}">
-                    <a16:creationId xmlns:a16="http://schemas.microsoft.com/office/drawing/2014/main" id="{137B15C9-72BD-475D-9E9A-FB1773735E00}"/>
-                  </a:ext>
-                </a:extLst>
-              </p:cNvPr>
-              <p:cNvSpPr txBox="1"/>
-              <p:nvPr/>
-            </p:nvSpPr>
-            <p:spPr>
-              <a:xfrm>
-                <a:off x="5715053" y="362908"/>
-                <a:ext cx="523462" cy="424283"/>
-              </a:xfrm>
-              <a:prstGeom prst="rect">
-                <a:avLst/>
-              </a:prstGeom>
-              <a:noFill/>
-            </p:spPr>
-            <p:txBody>
-              <a:bodyPr wrap="square" rtlCol="0">
-                <a:spAutoFit/>
-              </a:bodyPr>
-              <a:lstStyle/>
-              <a:p>
-                <a:pPr/>
-                <a14:m>
-                  <m:oMathPara xmlns:m="http://schemas.openxmlformats.org/officeDocument/2006/math">
-                    <m:oMathParaPr>
-                      <m:jc m:val="centerGroup"/>
-                    </m:oMathParaPr>
-                    <m:oMath xmlns:m="http://schemas.openxmlformats.org/officeDocument/2006/math">
-                      <m:sSub>
-                        <m:sSubPr>
-                          <m:ctrlPr>
-                            <a:rPr lang="en-US" altLang="zh-TW" sz="2000" i="1">
-                              <a:latin typeface="Cambria Math" panose="02040503050406030204" pitchFamily="18" charset="0"/>
-                            </a:rPr>
-                          </m:ctrlPr>
-                        </m:sSubPr>
-                        <m:e>
-                          <m:r>
-                            <a:rPr lang="en-US" altLang="zh-TW" sz="2000" i="1">
-                              <a:latin typeface="Cambria Math" panose="02040503050406030204" pitchFamily="18" charset="0"/>
-                            </a:rPr>
-                            <m:t>𝑄</m:t>
-                          </m:r>
-                        </m:e>
-                        <m:sub>
-                          <m:r>
-                            <a:rPr lang="en-US" altLang="zh-TW" sz="2000" i="1">
-                              <a:latin typeface="Cambria Math" panose="02040503050406030204" pitchFamily="18" charset="0"/>
-                            </a:rPr>
-                            <m:t>𝑦</m:t>
-                          </m:r>
-                        </m:sub>
-                      </m:sSub>
-                    </m:oMath>
-                  </m:oMathPara>
-                </a14:m>
-                <a:endParaRPr lang="en-US" altLang="zh-TW" sz="2000" dirty="0"/>
-              </a:p>
-            </p:txBody>
-          </p:sp>
-        </mc:Choice>
-        <mc:Fallback>
-          <p:sp>
-            <p:nvSpPr>
-              <p:cNvPr id="42" name="文字方塊 41">
-                <a:extLst>
-                  <a:ext uri="{FF2B5EF4-FFF2-40B4-BE49-F238E27FC236}">
-                    <a16:creationId xmlns:a16="http://schemas.microsoft.com/office/drawing/2014/main" id="{137B15C9-72BD-475D-9E9A-FB1773735E00}"/>
-                  </a:ext>
-                </a:extLst>
-              </p:cNvPr>
-              <p:cNvSpPr txBox="1">
-                <a:spLocks noRot="1" noChangeAspect="1" noMove="1" noResize="1" noEditPoints="1" noAdjustHandles="1" noChangeArrowheads="1" noChangeShapeType="1" noTextEdit="1"/>
-              </p:cNvSpPr>
-              <p:nvPr/>
-            </p:nvSpPr>
-            <p:spPr>
-              <a:xfrm>
-                <a:off x="5715053" y="362908"/>
-                <a:ext cx="523462" cy="424283"/>
-              </a:xfrm>
-              <a:prstGeom prst="rect">
-                <a:avLst/>
-              </a:prstGeom>
-              <a:blipFill>
-                <a:blip r:embed="rId5"/>
-                <a:stretch>
-                  <a:fillRect b="-5797"/>
-                </a:stretch>
-              </a:blipFill>
-            </p:spPr>
-            <p:txBody>
-              <a:bodyPr/>
-              <a:lstStyle/>
-              <a:p>
-                <a:r>
-                  <a:rPr lang="zh-TW" altLang="en-US">
-                    <a:noFill/>
-                  </a:rPr>
-                  <a:t> </a:t>
-                </a:r>
-              </a:p>
-            </p:txBody>
-          </p:sp>
-        </mc:Fallback>
-      </mc:AlternateContent>
-      <mc:AlternateContent xmlns:mc="http://schemas.openxmlformats.org/markup-compatibility/2006">
-        <mc:Choice xmlns:a14="http://schemas.microsoft.com/office/drawing/2010/main" Requires="a14">
-          <p:sp>
-            <p:nvSpPr>
-              <p:cNvPr id="43" name="文字方塊 42">
-                <a:extLst>
-                  <a:ext uri="{FF2B5EF4-FFF2-40B4-BE49-F238E27FC236}">
-                    <a16:creationId xmlns:a16="http://schemas.microsoft.com/office/drawing/2014/main" id="{AEF72226-30F7-485F-9029-D1D49AEF1D4B}"/>
-                  </a:ext>
-                </a:extLst>
-              </p:cNvPr>
-              <p:cNvSpPr txBox="1"/>
-              <p:nvPr/>
-            </p:nvSpPr>
-            <p:spPr>
-              <a:xfrm>
-                <a:off x="5987180" y="674065"/>
-                <a:ext cx="394126" cy="400110"/>
-              </a:xfrm>
-              <a:prstGeom prst="rect">
-                <a:avLst/>
-              </a:prstGeom>
-              <a:noFill/>
-            </p:spPr>
-            <p:txBody>
-              <a:bodyPr wrap="square" rtlCol="0">
-                <a:spAutoFit/>
-              </a:bodyPr>
-              <a:lstStyle/>
-              <a:p>
-                <a:pPr/>
-                <a14:m>
-                  <m:oMathPara xmlns:m="http://schemas.openxmlformats.org/officeDocument/2006/math">
-                    <m:oMathParaPr>
-                      <m:jc m:val="centerGroup"/>
-                    </m:oMathParaPr>
-                    <m:oMath xmlns:m="http://schemas.openxmlformats.org/officeDocument/2006/math">
-                      <m:sSub>
-                        <m:sSubPr>
-                          <m:ctrlPr>
-                            <a:rPr lang="en-US" altLang="zh-TW" sz="2000" i="1">
-                              <a:latin typeface="Cambria Math" panose="02040503050406030204" pitchFamily="18" charset="0"/>
-                            </a:rPr>
-                          </m:ctrlPr>
-                        </m:sSubPr>
-                        <m:e>
-                          <m:r>
-                            <a:rPr lang="en-US" altLang="zh-TW" sz="2000" i="1">
-                              <a:latin typeface="Cambria Math" panose="02040503050406030204" pitchFamily="18" charset="0"/>
-                            </a:rPr>
-                            <m:t>𝑄</m:t>
-                          </m:r>
-                        </m:e>
-                        <m:sub>
-                          <m:r>
-                            <a:rPr lang="en-US" altLang="zh-TW" sz="2000" i="1">
-                              <a:latin typeface="Cambria Math" panose="02040503050406030204" pitchFamily="18" charset="0"/>
-                            </a:rPr>
-                            <m:t>𝑥</m:t>
-                          </m:r>
-                        </m:sub>
-                      </m:sSub>
-                    </m:oMath>
-                  </m:oMathPara>
-                </a14:m>
-                <a:endParaRPr lang="en-US" altLang="zh-TW" sz="2000" dirty="0"/>
-              </a:p>
-            </p:txBody>
-          </p:sp>
-        </mc:Choice>
-        <mc:Fallback>
-          <p:sp>
-            <p:nvSpPr>
-              <p:cNvPr id="43" name="文字方塊 42">
-                <a:extLst>
-                  <a:ext uri="{FF2B5EF4-FFF2-40B4-BE49-F238E27FC236}">
-                    <a16:creationId xmlns:a16="http://schemas.microsoft.com/office/drawing/2014/main" id="{AEF72226-30F7-485F-9029-D1D49AEF1D4B}"/>
-                  </a:ext>
-                </a:extLst>
-              </p:cNvPr>
-              <p:cNvSpPr txBox="1">
-                <a:spLocks noRot="1" noChangeAspect="1" noMove="1" noResize="1" noEditPoints="1" noAdjustHandles="1" noChangeArrowheads="1" noChangeShapeType="1" noTextEdit="1"/>
-              </p:cNvSpPr>
-              <p:nvPr/>
-            </p:nvSpPr>
-            <p:spPr>
-              <a:xfrm>
-                <a:off x="5987180" y="674065"/>
-                <a:ext cx="394126" cy="400110"/>
-              </a:xfrm>
-              <a:prstGeom prst="rect">
-                <a:avLst/>
-              </a:prstGeom>
-              <a:blipFill>
-                <a:blip r:embed="rId6"/>
-                <a:stretch>
-                  <a:fillRect l="-4615" r="-4615" b="-9231"/>
-                </a:stretch>
-              </a:blipFill>
-            </p:spPr>
-            <p:txBody>
-              <a:bodyPr/>
-              <a:lstStyle/>
-              <a:p>
-                <a:r>
-                  <a:rPr lang="zh-TW" altLang="en-US">
-                    <a:noFill/>
-                  </a:rPr>
-                  <a:t> </a:t>
-                </a:r>
-              </a:p>
-            </p:txBody>
-          </p:sp>
-        </mc:Fallback>
-      </mc:AlternateContent>
-    </p:spTree>
-    <p:extLst>
-      <p:ext uri="{BB962C8B-B14F-4D97-AF65-F5344CB8AC3E}">
-        <p14:creationId xmlns:p14="http://schemas.microsoft.com/office/powerpoint/2010/main" val="723472905"/>
-      </p:ext>
-    </p:extLst>
-  </p:cSld>
-  <p:clrMapOvr>
-    <a:masterClrMapping/>
-  </p:clrMapOvr>
-</p:sld>
-</file>
-
-<file path=ppt/slides/slide10.xml><?xml version="1.0" encoding="utf-8"?>
-<p:sld xmlns:a="http://schemas.openxmlformats.org/drawingml/2006/main" xmlns:r="http://schemas.openxmlformats.org/officeDocument/2006/relationships" xmlns:p="http://schemas.openxmlformats.org/presentationml/2006/main" show="0">
-  <p:cSld>
-    <p:spTree>
-      <p:nvGrpSpPr>
-        <p:cNvPr id="1" name=""/>
-        <p:cNvGrpSpPr/>
-        <p:nvPr/>
-      </p:nvGrpSpPr>
-      <p:grpSpPr>
-        <a:xfrm>
-          <a:off x="0" y="0"/>
-          <a:ext cx="0" cy="0"/>
-          <a:chOff x="0" y="0"/>
-          <a:chExt cx="0" cy="0"/>
-        </a:xfrm>
-      </p:grpSpPr>
-      <p:sp>
-        <p:nvSpPr>
-          <p:cNvPr id="34" name="矩形: 圓角 33">
-            <a:extLst>
-              <a:ext uri="{FF2B5EF4-FFF2-40B4-BE49-F238E27FC236}">
-                <a16:creationId xmlns:a16="http://schemas.microsoft.com/office/drawing/2014/main" id="{3380EA81-C5F8-4D79-838A-1520DA874E3D}"/>
-              </a:ext>
-            </a:extLst>
-          </p:cNvPr>
-          <p:cNvSpPr/>
-          <p:nvPr/>
-        </p:nvSpPr>
-        <p:spPr>
-          <a:xfrm>
-            <a:off x="2144387" y="-1652527"/>
-            <a:ext cx="5617233" cy="5030638"/>
-          </a:xfrm>
-          <a:prstGeom prst="roundRect">
-            <a:avLst>
-              <a:gd name="adj" fmla="val 4125"/>
-            </a:avLst>
-          </a:prstGeom>
-          <a:gradFill flip="none" rotWithShape="1">
-            <a:gsLst>
-              <a:gs pos="0">
-                <a:schemeClr val="bg1">
-                  <a:lumMod val="95000"/>
-                </a:schemeClr>
-              </a:gs>
-              <a:gs pos="100000">
-                <a:schemeClr val="bg1">
-                  <a:lumMod val="85000"/>
-                </a:schemeClr>
-              </a:gs>
-            </a:gsLst>
-            <a:lin ang="5400000" scaled="1"/>
-            <a:tileRect/>
-          </a:gradFill>
-        </p:spPr>
-        <p:style>
-          <a:lnRef idx="1">
-            <a:schemeClr val="accent3"/>
-          </a:lnRef>
-          <a:fillRef idx="2">
-            <a:schemeClr val="accent3"/>
-          </a:fillRef>
-          <a:effectRef idx="1">
-            <a:schemeClr val="accent3"/>
-          </a:effectRef>
-          <a:fontRef idx="minor">
-            <a:schemeClr val="dk1"/>
-          </a:fontRef>
-        </p:style>
-        <p:txBody>
-          <a:bodyPr rot="0" spcFirstLastPara="0" vertOverflow="overflow" horzOverflow="overflow" vert="horz" wrap="square" lIns="37158" tIns="18579" rIns="37158" bIns="18579" numCol="1" spcCol="0" rtlCol="0" fromWordArt="0" anchor="ctr" anchorCtr="0" forceAA="0" compatLnSpc="1">
-            <a:prstTxWarp prst="textNoShape">
-              <a:avLst/>
-            </a:prstTxWarp>
-            <a:noAutofit/>
-          </a:bodyPr>
-          <a:lstStyle/>
-          <a:p>
-            <a:pPr algn="ctr"/>
-            <a:endParaRPr lang="zh-TW" altLang="en-US" sz="2000" dirty="0">
-              <a:latin typeface="Times New Roman" panose="02020603050405020304" pitchFamily="18" charset="0"/>
-              <a:cs typeface="Times New Roman" panose="02020603050405020304" pitchFamily="18" charset="0"/>
-            </a:endParaRPr>
-          </a:p>
-        </p:txBody>
-      </p:sp>
-      <p:sp>
-        <p:nvSpPr>
-          <p:cNvPr id="29" name="矩形: 圓角 28">
-            <a:extLst>
-              <a:ext uri="{FF2B5EF4-FFF2-40B4-BE49-F238E27FC236}">
-                <a16:creationId xmlns:a16="http://schemas.microsoft.com/office/drawing/2014/main" id="{8A063E4B-5939-4A6B-BBA1-577A84F295CD}"/>
-              </a:ext>
-            </a:extLst>
-          </p:cNvPr>
-          <p:cNvSpPr/>
-          <p:nvPr/>
-        </p:nvSpPr>
-        <p:spPr>
-          <a:xfrm>
-            <a:off x="3178175" y="-551046"/>
-            <a:ext cx="4445425" cy="3776843"/>
-          </a:xfrm>
-          <a:prstGeom prst="roundRect">
-            <a:avLst>
-              <a:gd name="adj" fmla="val 4125"/>
-            </a:avLst>
-          </a:prstGeom>
-          <a:gradFill flip="none" rotWithShape="1">
-            <a:gsLst>
-              <a:gs pos="100000">
-                <a:schemeClr val="bg1">
-                  <a:lumMod val="95000"/>
-                </a:schemeClr>
-              </a:gs>
-              <a:gs pos="0">
-                <a:schemeClr val="bg1">
-                  <a:lumMod val="85000"/>
-                </a:schemeClr>
-              </a:gs>
-            </a:gsLst>
-            <a:lin ang="5400000" scaled="1"/>
-            <a:tileRect/>
-          </a:gradFill>
-        </p:spPr>
-        <p:style>
-          <a:lnRef idx="1">
-            <a:schemeClr val="accent3"/>
-          </a:lnRef>
-          <a:fillRef idx="2">
-            <a:schemeClr val="accent3"/>
-          </a:fillRef>
-          <a:effectRef idx="1">
-            <a:schemeClr val="accent3"/>
-          </a:effectRef>
-          <a:fontRef idx="minor">
-            <a:schemeClr val="dk1"/>
-          </a:fontRef>
-        </p:style>
-        <p:txBody>
-          <a:bodyPr rot="0" spcFirstLastPara="0" vertOverflow="overflow" horzOverflow="overflow" vert="horz" wrap="square" lIns="37158" tIns="18579" rIns="37158" bIns="18579" numCol="1" spcCol="0" rtlCol="0" fromWordArt="0" anchor="ctr" anchorCtr="0" forceAA="0" compatLnSpc="1">
-            <a:prstTxWarp prst="textNoShape">
-              <a:avLst/>
-            </a:prstTxWarp>
-            <a:noAutofit/>
-          </a:bodyPr>
-          <a:lstStyle/>
-          <a:p>
-            <a:pPr algn="ctr"/>
-            <a:endParaRPr lang="zh-TW" altLang="en-US" sz="2000" dirty="0">
-              <a:latin typeface="Times New Roman" panose="02020603050405020304" pitchFamily="18" charset="0"/>
-              <a:cs typeface="Times New Roman" panose="02020603050405020304" pitchFamily="18" charset="0"/>
-            </a:endParaRPr>
-          </a:p>
-        </p:txBody>
-      </p:sp>
-      <p:pic>
-        <p:nvPicPr>
-          <p:cNvPr id="13" name="圖片 12">
-            <a:extLst>
-              <a:ext uri="{FF2B5EF4-FFF2-40B4-BE49-F238E27FC236}">
-                <a16:creationId xmlns:a16="http://schemas.microsoft.com/office/drawing/2014/main" id="{009B6563-DECD-4DFA-8D64-23AB9F9457C4}"/>
-              </a:ext>
-            </a:extLst>
-          </p:cNvPr>
-          <p:cNvPicPr>
-            <a:picLocks noChangeAspect="1"/>
-          </p:cNvPicPr>
-          <p:nvPr/>
-        </p:nvPicPr>
-        <p:blipFill rotWithShape="1">
-          <a:blip r:embed="rId2">
-            <a:clrChange>
-              <a:clrFrom>
-                <a:srgbClr val="FFFFFF"/>
-              </a:clrFrom>
-              <a:clrTo>
-                <a:srgbClr val="FFFFFF">
-                  <a:alpha val="0"/>
-                </a:srgbClr>
-              </a:clrTo>
-            </a:clrChange>
-            <a:extLst>
-              <a:ext uri="{28A0092B-C50C-407E-A947-70E740481C1C}">
-                <a14:useLocalDpi xmlns:a14="http://schemas.microsoft.com/office/drawing/2010/main" val="0"/>
-              </a:ext>
-            </a:extLst>
-          </a:blip>
-          <a:srcRect t="38616" b="10315"/>
-          <a:stretch/>
-        </p:blipFill>
-        <p:spPr>
-          <a:xfrm>
-            <a:off x="3145416" y="-364283"/>
-            <a:ext cx="2286000" cy="3502325"/>
-          </a:xfrm>
-          <a:prstGeom prst="rect">
-            <a:avLst/>
-          </a:prstGeom>
-        </p:spPr>
-      </p:pic>
-      <mc:AlternateContent xmlns:mc="http://schemas.openxmlformats.org/markup-compatibility/2006" xmlns:a14="http://schemas.microsoft.com/office/drawing/2010/main">
-        <mc:Choice Requires="a14">
-          <p:sp>
-            <p:nvSpPr>
-              <p:cNvPr id="8" name="矩形 7">
-                <a:extLst>
-                  <a:ext uri="{FF2B5EF4-FFF2-40B4-BE49-F238E27FC236}">
-                    <a16:creationId xmlns:a16="http://schemas.microsoft.com/office/drawing/2014/main" id="{F814741D-73B4-4BCC-A5CF-96247C4F6A0B}"/>
-                  </a:ext>
-                </a:extLst>
-              </p:cNvPr>
-              <p:cNvSpPr/>
-              <p:nvPr/>
-            </p:nvSpPr>
-            <p:spPr>
-              <a:xfrm>
-                <a:off x="3457533" y="-873341"/>
-                <a:ext cx="1393074" cy="611514"/>
-              </a:xfrm>
-              <a:prstGeom prst="rect">
-                <a:avLst/>
-              </a:prstGeom>
-            </p:spPr>
-            <p:txBody>
-              <a:bodyPr wrap="none">
-                <a:spAutoFit/>
-              </a:bodyPr>
-              <a:lstStyle/>
-              <a:p>
-                <a:pPr algn="r"/>
-                <a14:m>
-                  <m:oMathPara xmlns:m="http://schemas.openxmlformats.org/officeDocument/2006/math">
-                    <m:oMathParaPr>
-                      <m:jc m:val="centerGroup"/>
-                    </m:oMathParaPr>
-                    <m:oMath xmlns:m="http://schemas.openxmlformats.org/officeDocument/2006/math">
-                      <m:sSup>
-                        <m:sSupPr>
-                          <m:ctrlPr>
-                            <a:rPr lang="en-US" altLang="zh-TW" sz="2000" i="1">
-                              <a:latin typeface="Cambria Math" panose="02040503050406030204" pitchFamily="18" charset="0"/>
-                            </a:rPr>
-                          </m:ctrlPr>
-                        </m:sSupPr>
-                        <m:e>
-                          <m:d>
-                            <m:dPr>
-                              <m:begChr m:val="|"/>
-                              <m:endChr m:val="|"/>
-                              <m:ctrlPr>
-                                <a:rPr lang="en-US" altLang="zh-TW" sz="2000" i="1">
-                                  <a:latin typeface="Cambria Math" panose="02040503050406030204" pitchFamily="18" charset="0"/>
-                                </a:rPr>
-                              </m:ctrlPr>
-                            </m:dPr>
-                            <m:e>
-                              <m:sSubSup>
-                                <m:sSubSupPr>
-                                  <m:ctrlPr>
-                                    <a:rPr lang="en-US" altLang="zh-TW" sz="2000" i="1">
-                                      <a:latin typeface="Cambria Math" panose="02040503050406030204" pitchFamily="18" charset="0"/>
-                                    </a:rPr>
-                                  </m:ctrlPr>
-                                </m:sSubSupPr>
-                                <m:e>
-                                  <m:acc>
-                                    <m:accPr>
-                                      <m:chr m:val="̃"/>
-                                      <m:ctrlPr>
-                                        <a:rPr lang="en-US" altLang="zh-TW" sz="2000" i="1">
-                                          <a:latin typeface="Cambria Math" panose="02040503050406030204" pitchFamily="18" charset="0"/>
-                                        </a:rPr>
-                                      </m:ctrlPr>
-                                    </m:accPr>
-                                    <m:e>
-                                      <m:r>
-                                        <a:rPr lang="en-US" altLang="zh-TW" sz="2000" i="1">
-                                          <a:latin typeface="Cambria Math" panose="02040503050406030204" pitchFamily="18" charset="0"/>
-                                        </a:rPr>
-                                        <m:t>𝑀</m:t>
-                                      </m:r>
-                                    </m:e>
-                                  </m:acc>
-                                </m:e>
-                                <m:sub>
-                                  <m:r>
-                                    <a:rPr lang="en-US" altLang="zh-TW" sz="2000" i="1">
-                                      <a:latin typeface="Cambria Math" panose="02040503050406030204" pitchFamily="18" charset="0"/>
-                                    </a:rPr>
-                                    <m:t>𝑆</m:t>
-                                  </m:r>
-                                  <m:r>
-                                    <a:rPr lang="en-US" altLang="zh-TW" sz="2000" i="1">
-                                      <a:latin typeface="Cambria Math" panose="02040503050406030204" pitchFamily="18" charset="0"/>
-                                    </a:rPr>
-                                    <m:t>,</m:t>
-                                  </m:r>
-                                  <m:r>
-                                    <a:rPr lang="en-US" altLang="zh-TW" sz="2000" b="1" i="1">
-                                      <a:latin typeface="Cambria Math" panose="02040503050406030204" pitchFamily="18" charset="0"/>
-                                    </a:rPr>
-                                    <m:t>𝑸</m:t>
-                                  </m:r>
-                                </m:sub>
-                                <m:sup>
-                                  <m:acc>
-                                    <m:accPr>
-                                      <m:chr m:val="̂"/>
-                                      <m:ctrlPr>
-                                        <a:rPr lang="en-US" altLang="zh-TW" sz="2000" b="1" i="1">
-                                          <a:latin typeface="Cambria Math" panose="02040503050406030204" pitchFamily="18" charset="0"/>
-                                        </a:rPr>
-                                      </m:ctrlPr>
-                                    </m:accPr>
-                                    <m:e>
-                                      <m:r>
-                                        <a:rPr lang="en-US" altLang="zh-TW" sz="2000" b="1" i="1">
-                                          <a:latin typeface="Cambria Math" panose="02040503050406030204" pitchFamily="18" charset="0"/>
-                                        </a:rPr>
-                                        <m:t>𝒙</m:t>
-                                      </m:r>
-                                    </m:e>
-                                  </m:acc>
-                                  <m:r>
-                                    <a:rPr lang="en-US" altLang="zh-TW" sz="2000" i="1">
-                                      <a:latin typeface="Cambria Math" panose="02040503050406030204" pitchFamily="18" charset="0"/>
-                                    </a:rPr>
-                                    <m:t>−</m:t>
-                                  </m:r>
-                                  <m:r>
-                                    <a:rPr lang="en-US" altLang="zh-TW" sz="2000" i="1">
-                                      <a:latin typeface="Cambria Math" panose="02040503050406030204" pitchFamily="18" charset="0"/>
-                                    </a:rPr>
-                                    <m:t>𝑖</m:t>
-                                  </m:r>
-                                  <m:acc>
-                                    <m:accPr>
-                                      <m:chr m:val="̂"/>
-                                      <m:ctrlPr>
-                                        <a:rPr lang="en-US" altLang="zh-TW" sz="2000" b="1" i="1">
-                                          <a:latin typeface="Cambria Math" panose="02040503050406030204" pitchFamily="18" charset="0"/>
-                                        </a:rPr>
-                                      </m:ctrlPr>
-                                    </m:accPr>
-                                    <m:e>
-                                      <m:r>
-                                        <a:rPr lang="en-US" altLang="zh-TW" sz="2000" b="1" i="1">
-                                          <a:latin typeface="Cambria Math" panose="02040503050406030204" pitchFamily="18" charset="0"/>
-                                        </a:rPr>
-                                        <m:t>𝒚</m:t>
-                                      </m:r>
-                                    </m:e>
-                                  </m:acc>
-                                  <m:r>
-                                    <a:rPr lang="en-US" altLang="zh-TW" sz="2000" i="1">
-                                      <a:latin typeface="Cambria Math" panose="02040503050406030204" pitchFamily="18" charset="0"/>
-                                    </a:rPr>
-                                    <m:t>,1</m:t>
-                                  </m:r>
-                                </m:sup>
-                              </m:sSubSup>
-                            </m:e>
-                          </m:d>
-                        </m:e>
-                        <m:sup>
-                          <m:r>
-                            <a:rPr lang="en-US" altLang="zh-TW" sz="2000" i="1">
-                              <a:latin typeface="Cambria Math" panose="02040503050406030204" pitchFamily="18" charset="0"/>
-                            </a:rPr>
-                            <m:t>2</m:t>
-                          </m:r>
-                        </m:sup>
-                      </m:sSup>
-                      <m:r>
-                        <a:rPr lang="en-US" altLang="zh-TW" sz="2000" i="1">
-                          <a:latin typeface="Cambria Math" panose="02040503050406030204" pitchFamily="18" charset="0"/>
-                        </a:rPr>
-                        <m:t> </m:t>
-                      </m:r>
-                    </m:oMath>
-                  </m:oMathPara>
-                </a14:m>
-                <a:endParaRPr lang="zh-TW" altLang="en-US" sz="2000" dirty="0"/>
-              </a:p>
-            </p:txBody>
-          </p:sp>
-        </mc:Choice>
-        <mc:Fallback xmlns="">
-          <p:sp>
-            <p:nvSpPr>
-              <p:cNvPr id="8" name="矩形 7">
-                <a:extLst>
-                  <a:ext uri="{FF2B5EF4-FFF2-40B4-BE49-F238E27FC236}">
-                    <a16:creationId xmlns:a16="http://schemas.microsoft.com/office/drawing/2014/main" id="{F814741D-73B4-4BCC-A5CF-96247C4F6A0B}"/>
-                  </a:ext>
-                </a:extLst>
-              </p:cNvPr>
-              <p:cNvSpPr>
-                <a:spLocks noRot="1" noChangeAspect="1" noMove="1" noResize="1" noEditPoints="1" noAdjustHandles="1" noChangeArrowheads="1" noChangeShapeType="1" noTextEdit="1"/>
-              </p:cNvSpPr>
-              <p:nvPr/>
-            </p:nvSpPr>
-            <p:spPr>
-              <a:xfrm>
-                <a:off x="3457533" y="-873341"/>
-                <a:ext cx="1393074" cy="611514"/>
-              </a:xfrm>
-              <a:prstGeom prst="rect">
-                <a:avLst/>
-              </a:prstGeom>
-              <a:blipFill>
-                <a:blip r:embed="rId3"/>
-                <a:stretch>
-                  <a:fillRect/>
-                </a:stretch>
-              </a:blipFill>
-            </p:spPr>
-            <p:txBody>
-              <a:bodyPr/>
-              <a:lstStyle/>
-              <a:p>
-                <a:r>
-                  <a:rPr lang="zh-TW" altLang="en-US">
-                    <a:noFill/>
-                  </a:rPr>
-                  <a:t> </a:t>
-                </a:r>
-              </a:p>
-            </p:txBody>
-          </p:sp>
-        </mc:Fallback>
-      </mc:AlternateContent>
-      <mc:AlternateContent xmlns:mc="http://schemas.openxmlformats.org/markup-compatibility/2006" xmlns:a14="http://schemas.microsoft.com/office/drawing/2010/main">
-        <mc:Choice Requires="a14">
-          <p:sp>
-            <p:nvSpPr>
-              <p:cNvPr id="18" name="矩形 17">
-                <a:extLst>
-                  <a:ext uri="{FF2B5EF4-FFF2-40B4-BE49-F238E27FC236}">
-                    <a16:creationId xmlns:a16="http://schemas.microsoft.com/office/drawing/2014/main" id="{E18B0646-8D1C-436C-A556-9F6219308251}"/>
-                  </a:ext>
-                </a:extLst>
-              </p:cNvPr>
-              <p:cNvSpPr/>
-              <p:nvPr/>
-            </p:nvSpPr>
-            <p:spPr>
-              <a:xfrm>
-                <a:off x="5273956" y="-1034014"/>
-                <a:ext cx="2353786" cy="951351"/>
-              </a:xfrm>
-              <a:prstGeom prst="rect">
-                <a:avLst/>
-              </a:prstGeom>
-            </p:spPr>
-            <p:txBody>
-              <a:bodyPr wrap="none">
-                <a:spAutoFit/>
-              </a:bodyPr>
-              <a:lstStyle/>
-              <a:p>
-                <a:pPr/>
-                <a14:m>
-                  <m:oMathPara xmlns:m="http://schemas.openxmlformats.org/officeDocument/2006/math">
-                    <m:oMathParaPr>
-                      <m:jc m:val="centerGroup"/>
-                    </m:oMathParaPr>
-                    <m:oMath xmlns:m="http://schemas.openxmlformats.org/officeDocument/2006/math">
-                      <m:sSup>
-                        <m:sSupPr>
-                          <m:ctrlPr>
-                            <a:rPr lang="en-US" altLang="zh-TW" sz="2000" i="1" dirty="0">
-                              <a:latin typeface="Cambria Math" panose="02040503050406030204" pitchFamily="18" charset="0"/>
-                              <a:ea typeface="Cambria Math" panose="02040503050406030204" pitchFamily="18" charset="0"/>
-                            </a:rPr>
-                          </m:ctrlPr>
-                        </m:sSupPr>
-                        <m:e>
-                          <m:d>
-                            <m:dPr>
-                              <m:begChr m:val="|"/>
-                              <m:endChr m:val="|"/>
-                              <m:ctrlPr>
-                                <a:rPr lang="en-US" altLang="zh-TW" sz="2000" i="1" dirty="0">
-                                  <a:latin typeface="Cambria Math" panose="02040503050406030204" pitchFamily="18" charset="0"/>
-                                  <a:ea typeface="Cambria Math" panose="02040503050406030204" pitchFamily="18" charset="0"/>
-                                </a:rPr>
-                              </m:ctrlPr>
-                            </m:dPr>
-                            <m:e>
-                              <m:nary>
-                                <m:naryPr>
-                                  <m:chr m:val="∑"/>
-                                  <m:ctrlPr>
-                                    <a:rPr lang="en-US" altLang="zh-TW" sz="2000" i="1">
-                                      <a:latin typeface="Cambria Math" panose="02040503050406030204" pitchFamily="18" charset="0"/>
-                                    </a:rPr>
-                                  </m:ctrlPr>
-                                </m:naryPr>
-                                <m:sub>
-                                  <m:r>
-                                    <m:rPr>
-                                      <m:brk m:alnAt="23"/>
-                                    </m:rPr>
-                                    <a:rPr lang="en-US" altLang="zh-TW" sz="2000" b="1" i="1">
-                                      <a:latin typeface="Cambria Math" panose="02040503050406030204" pitchFamily="18" charset="0"/>
-                                    </a:rPr>
-                                    <m:t>𝑸</m:t>
-                                  </m:r>
-                                </m:sub>
-                                <m:sup>
-                                  <m:r>
-                                    <a:rPr lang="en-US" altLang="zh-TW" sz="2000" i="1">
-                                      <a:latin typeface="Cambria Math" panose="02040503050406030204" pitchFamily="18" charset="0"/>
-                                    </a:rPr>
-                                    <m:t> </m:t>
-                                  </m:r>
-                                </m:sup>
-                                <m:e>
-                                  <m:sSubSup>
-                                    <m:sSubSupPr>
-                                      <m:ctrlPr>
-                                        <a:rPr lang="en-US" altLang="zh-TW" sz="2000" i="1">
-                                          <a:latin typeface="Cambria Math" panose="02040503050406030204" pitchFamily="18" charset="0"/>
-                                        </a:rPr>
-                                      </m:ctrlPr>
-                                    </m:sSubSupPr>
-                                    <m:e>
-                                      <m:acc>
-                                        <m:accPr>
-                                          <m:chr m:val="̃"/>
-                                          <m:ctrlPr>
-                                            <a:rPr lang="en-US" altLang="zh-TW" sz="2000" i="1">
-                                              <a:latin typeface="Cambria Math" panose="02040503050406030204" pitchFamily="18" charset="0"/>
-                                            </a:rPr>
-                                          </m:ctrlPr>
-                                        </m:accPr>
-                                        <m:e>
-                                          <m:r>
-                                            <a:rPr lang="en-US" altLang="zh-TW" sz="2000" i="1">
-                                              <a:latin typeface="Cambria Math" panose="02040503050406030204" pitchFamily="18" charset="0"/>
-                                            </a:rPr>
-                                            <m:t>𝑀</m:t>
-                                          </m:r>
-                                        </m:e>
-                                      </m:acc>
-                                    </m:e>
-                                    <m:sub>
-                                      <m:r>
-                                        <a:rPr lang="en-US" altLang="zh-TW" sz="2000" i="1">
-                                          <a:latin typeface="Cambria Math" panose="02040503050406030204" pitchFamily="18" charset="0"/>
-                                        </a:rPr>
-                                        <m:t>𝑆</m:t>
-                                      </m:r>
-                                      <m:r>
-                                        <a:rPr lang="en-US" altLang="zh-TW" sz="2000" i="1">
-                                          <a:latin typeface="Cambria Math" panose="02040503050406030204" pitchFamily="18" charset="0"/>
-                                        </a:rPr>
-                                        <m:t>,</m:t>
-                                      </m:r>
-                                      <m:r>
-                                        <a:rPr lang="en-US" altLang="zh-TW" sz="2000" b="1" i="1">
-                                          <a:latin typeface="Cambria Math" panose="02040503050406030204" pitchFamily="18" charset="0"/>
-                                        </a:rPr>
-                                        <m:t>𝑸</m:t>
-                                      </m:r>
-                                    </m:sub>
-                                    <m:sup>
-                                      <m:acc>
-                                        <m:accPr>
-                                          <m:chr m:val="̂"/>
-                                          <m:ctrlPr>
-                                            <a:rPr lang="en-US" altLang="zh-TW" sz="2000" b="1" i="1">
-                                              <a:latin typeface="Cambria Math" panose="02040503050406030204" pitchFamily="18" charset="0"/>
-                                            </a:rPr>
-                                          </m:ctrlPr>
-                                        </m:accPr>
-                                        <m:e>
-                                          <m:r>
-                                            <a:rPr lang="en-US" altLang="zh-TW" sz="2000" b="1" i="1">
-                                              <a:latin typeface="Cambria Math" panose="02040503050406030204" pitchFamily="18" charset="0"/>
-                                            </a:rPr>
-                                            <m:t>𝒙</m:t>
-                                          </m:r>
-                                        </m:e>
-                                      </m:acc>
-                                      <m:r>
-                                        <a:rPr lang="en-US" altLang="zh-TW" sz="2000" i="1">
-                                          <a:latin typeface="Cambria Math" panose="02040503050406030204" pitchFamily="18" charset="0"/>
-                                        </a:rPr>
-                                        <m:t>−</m:t>
-                                      </m:r>
-                                      <m:r>
-                                        <a:rPr lang="en-US" altLang="zh-TW" sz="2000" i="1">
-                                          <a:latin typeface="Cambria Math" panose="02040503050406030204" pitchFamily="18" charset="0"/>
-                                        </a:rPr>
-                                        <m:t>𝑖</m:t>
-                                      </m:r>
-                                      <m:acc>
-                                        <m:accPr>
-                                          <m:chr m:val="̂"/>
-                                          <m:ctrlPr>
-                                            <a:rPr lang="en-US" altLang="zh-TW" sz="2000" b="1" i="1">
-                                              <a:latin typeface="Cambria Math" panose="02040503050406030204" pitchFamily="18" charset="0"/>
-                                            </a:rPr>
-                                          </m:ctrlPr>
-                                        </m:accPr>
-                                        <m:e>
-                                          <m:r>
-                                            <a:rPr lang="en-US" altLang="zh-TW" sz="2000" b="1" i="1">
-                                              <a:latin typeface="Cambria Math" panose="02040503050406030204" pitchFamily="18" charset="0"/>
-                                            </a:rPr>
-                                            <m:t>𝒚</m:t>
-                                          </m:r>
-                                        </m:e>
-                                      </m:acc>
-                                      <m:r>
-                                        <a:rPr lang="en-US" altLang="zh-TW" sz="2000" i="1" dirty="0">
-                                          <a:latin typeface="Cambria Math" panose="02040503050406030204" pitchFamily="18" charset="0"/>
-                                          <a:cs typeface="Times New Roman" panose="02020603050405020304" pitchFamily="18" charset="0"/>
-                                        </a:rPr>
-                                        <m:t>, 1</m:t>
-                                      </m:r>
-                                    </m:sup>
-                                  </m:sSubSup>
-                                  <m:sSup>
-                                    <m:sSupPr>
-                                      <m:ctrlPr>
-                                        <a:rPr lang="en-US" altLang="zh-TW" sz="2000" i="1" dirty="0">
-                                          <a:latin typeface="Cambria Math" panose="02040503050406030204" pitchFamily="18" charset="0"/>
-                                          <a:cs typeface="Times New Roman" panose="02020603050405020304" pitchFamily="18" charset="0"/>
-                                        </a:rPr>
-                                      </m:ctrlPr>
-                                    </m:sSupPr>
-                                    <m:e>
-                                      <m:r>
-                                        <a:rPr lang="en-US" altLang="zh-TW" sz="2000" i="1" dirty="0">
-                                          <a:latin typeface="Cambria Math" panose="02040503050406030204" pitchFamily="18" charset="0"/>
-                                          <a:cs typeface="Times New Roman" panose="02020603050405020304" pitchFamily="18" charset="0"/>
-                                        </a:rPr>
-                                        <m:t>𝑒</m:t>
-                                      </m:r>
-                                    </m:e>
-                                    <m:sup>
-                                      <m:r>
-                                        <a:rPr lang="en-US" altLang="zh-TW" sz="2000" i="1" dirty="0">
-                                          <a:latin typeface="Cambria Math" panose="02040503050406030204" pitchFamily="18" charset="0"/>
-                                          <a:cs typeface="Times New Roman" panose="02020603050405020304" pitchFamily="18" charset="0"/>
-                                        </a:rPr>
-                                        <m:t>𝑖</m:t>
-                                      </m:r>
-                                      <m:r>
-                                        <a:rPr lang="en-US" altLang="zh-TW" sz="2000" b="1" i="1" dirty="0">
-                                          <a:latin typeface="Cambria Math" panose="02040503050406030204" pitchFamily="18" charset="0"/>
-                                          <a:cs typeface="Times New Roman" panose="02020603050405020304" pitchFamily="18" charset="0"/>
-                                        </a:rPr>
-                                        <m:t>𝑸</m:t>
-                                      </m:r>
-                                      <m:r>
-                                        <a:rPr lang="en-US" altLang="zh-TW" sz="2000" i="1" dirty="0">
-                                          <a:latin typeface="Cambria Math" panose="02040503050406030204" pitchFamily="18" charset="0"/>
-                                          <a:cs typeface="Times New Roman" panose="02020603050405020304" pitchFamily="18" charset="0"/>
-                                        </a:rPr>
-                                        <m:t>⋅</m:t>
-                                      </m:r>
-                                      <m:sSub>
-                                        <m:sSubPr>
-                                          <m:ctrlPr>
-                                            <a:rPr lang="en-US" altLang="zh-TW" sz="2000" i="1" dirty="0">
-                                              <a:latin typeface="Cambria Math" panose="02040503050406030204" pitchFamily="18" charset="0"/>
-                                            </a:rPr>
-                                          </m:ctrlPr>
-                                        </m:sSubPr>
-                                        <m:e>
-                                          <m:r>
-                                            <a:rPr lang="en-US" altLang="zh-TW" sz="2000" b="1" i="1" dirty="0">
-                                              <a:latin typeface="Cambria Math" panose="02040503050406030204" pitchFamily="18" charset="0"/>
-                                            </a:rPr>
-                                            <m:t>𝑹</m:t>
-                                          </m:r>
-                                        </m:e>
-                                        <m:sub>
-                                          <m:r>
-                                            <a:rPr lang="en-US" altLang="zh-TW" sz="2000" i="1" dirty="0">
-                                              <a:latin typeface="Cambria Math" panose="02040503050406030204" pitchFamily="18" charset="0"/>
-                                            </a:rPr>
-                                            <m:t>𝑐</m:t>
-                                          </m:r>
-                                        </m:sub>
-                                      </m:sSub>
-                                    </m:sup>
-                                  </m:sSup>
-                                </m:e>
-                              </m:nary>
-                            </m:e>
-                          </m:d>
-                        </m:e>
-                        <m:sup>
-                          <m:r>
-                            <a:rPr lang="en-US" altLang="zh-TW" sz="2000" i="1" dirty="0">
-                              <a:latin typeface="Cambria Math" panose="02040503050406030204" pitchFamily="18" charset="0"/>
-                              <a:ea typeface="Cambria Math" panose="02040503050406030204" pitchFamily="18" charset="0"/>
-                            </a:rPr>
-                            <m:t>2</m:t>
-                          </m:r>
-                        </m:sup>
-                      </m:sSup>
-                    </m:oMath>
-                  </m:oMathPara>
-                </a14:m>
-                <a:endParaRPr lang="zh-TW" altLang="en-US" sz="2000" dirty="0"/>
-              </a:p>
-            </p:txBody>
-          </p:sp>
-        </mc:Choice>
-        <mc:Fallback xmlns="">
-          <p:sp>
-            <p:nvSpPr>
-              <p:cNvPr id="18" name="矩形 17">
-                <a:extLst>
-                  <a:ext uri="{FF2B5EF4-FFF2-40B4-BE49-F238E27FC236}">
-                    <a16:creationId xmlns:a16="http://schemas.microsoft.com/office/drawing/2014/main" id="{E18B0646-8D1C-436C-A556-9F6219308251}"/>
-                  </a:ext>
-                </a:extLst>
-              </p:cNvPr>
-              <p:cNvSpPr>
-                <a:spLocks noRot="1" noChangeAspect="1" noMove="1" noResize="1" noEditPoints="1" noAdjustHandles="1" noChangeArrowheads="1" noChangeShapeType="1" noTextEdit="1"/>
-              </p:cNvSpPr>
-              <p:nvPr/>
-            </p:nvSpPr>
-            <p:spPr>
-              <a:xfrm>
-                <a:off x="5273956" y="-1034014"/>
-                <a:ext cx="2353786" cy="951351"/>
-              </a:xfrm>
-              <a:prstGeom prst="rect">
-                <a:avLst/>
-              </a:prstGeom>
-              <a:blipFill>
-                <a:blip r:embed="rId4"/>
-                <a:stretch>
-                  <a:fillRect/>
-                </a:stretch>
-              </a:blipFill>
-            </p:spPr>
-            <p:txBody>
-              <a:bodyPr/>
-              <a:lstStyle/>
-              <a:p>
-                <a:r>
-                  <a:rPr lang="zh-TW" altLang="en-US">
-                    <a:noFill/>
-                  </a:rPr>
-                  <a:t> </a:t>
-                </a:r>
-              </a:p>
-            </p:txBody>
-          </p:sp>
-        </mc:Fallback>
-      </mc:AlternateContent>
-      <mc:AlternateContent xmlns:mc="http://schemas.openxmlformats.org/markup-compatibility/2006" xmlns:a14="http://schemas.microsoft.com/office/drawing/2010/main">
-        <mc:Choice Requires="a14">
-          <p:sp>
-            <p:nvSpPr>
-              <p:cNvPr id="19" name="矩形 18">
-                <a:extLst>
-                  <a:ext uri="{FF2B5EF4-FFF2-40B4-BE49-F238E27FC236}">
-                    <a16:creationId xmlns:a16="http://schemas.microsoft.com/office/drawing/2014/main" id="{724B1F99-7073-4C1C-ACB8-889E61687D54}"/>
-                  </a:ext>
-                </a:extLst>
-              </p:cNvPr>
-              <p:cNvSpPr/>
-              <p:nvPr/>
-            </p:nvSpPr>
-            <p:spPr>
-              <a:xfrm>
-                <a:off x="2271779" y="312501"/>
-                <a:ext cx="905761" cy="400110"/>
-              </a:xfrm>
-              <a:prstGeom prst="rect">
-                <a:avLst/>
-              </a:prstGeom>
-            </p:spPr>
-            <p:txBody>
-              <a:bodyPr wrap="none">
-                <a:spAutoFit/>
-              </a:bodyPr>
-              <a:lstStyle/>
-              <a:p>
-                <a:pPr/>
-                <a14:m>
-                  <m:oMathPara xmlns:m="http://schemas.openxmlformats.org/officeDocument/2006/math">
-                    <m:oMathParaPr>
-                      <m:jc m:val="centerGroup"/>
-                    </m:oMathParaPr>
-                    <m:oMath xmlns:m="http://schemas.openxmlformats.org/officeDocument/2006/math">
-                      <m:r>
-                        <a:rPr lang="en-US" altLang="zh-TW" sz="2000" i="1">
-                          <a:latin typeface="Cambria Math" panose="02040503050406030204" pitchFamily="18" charset="0"/>
-                        </a:rPr>
-                        <m:t>𝑆</m:t>
-                      </m:r>
-                      <m:r>
-                        <a:rPr lang="en-US" altLang="zh-TW" sz="2000" i="1">
-                          <a:latin typeface="Cambria Math" panose="02040503050406030204" pitchFamily="18" charset="0"/>
-                        </a:rPr>
-                        <m:t>=</m:t>
-                      </m:r>
-                      <m:r>
-                        <a:rPr lang="en-US" altLang="zh-TW" sz="2000" i="1">
-                          <a:latin typeface="Cambria Math" panose="02040503050406030204" pitchFamily="18" charset="0"/>
-                        </a:rPr>
-                        <m:t>𝐾</m:t>
-                      </m:r>
-                    </m:oMath>
-                  </m:oMathPara>
-                </a14:m>
-                <a:endParaRPr lang="zh-TW" altLang="en-US" sz="2000" dirty="0"/>
-              </a:p>
-            </p:txBody>
-          </p:sp>
-        </mc:Choice>
-        <mc:Fallback xmlns="">
-          <p:sp>
-            <p:nvSpPr>
-              <p:cNvPr id="19" name="矩形 18">
-                <a:extLst>
-                  <a:ext uri="{FF2B5EF4-FFF2-40B4-BE49-F238E27FC236}">
-                    <a16:creationId xmlns:a16="http://schemas.microsoft.com/office/drawing/2014/main" id="{724B1F99-7073-4C1C-ACB8-889E61687D54}"/>
-                  </a:ext>
-                </a:extLst>
-              </p:cNvPr>
-              <p:cNvSpPr>
-                <a:spLocks noRot="1" noChangeAspect="1" noMove="1" noResize="1" noEditPoints="1" noAdjustHandles="1" noChangeArrowheads="1" noChangeShapeType="1" noTextEdit="1"/>
-              </p:cNvSpPr>
-              <p:nvPr/>
-            </p:nvSpPr>
-            <p:spPr>
-              <a:xfrm>
-                <a:off x="2271779" y="312501"/>
-                <a:ext cx="905761" cy="400110"/>
-              </a:xfrm>
-              <a:prstGeom prst="rect">
-                <a:avLst/>
-              </a:prstGeom>
-              <a:blipFill>
-                <a:blip r:embed="rId5"/>
-                <a:stretch>
-                  <a:fillRect/>
-                </a:stretch>
-              </a:blipFill>
-            </p:spPr>
-            <p:txBody>
-              <a:bodyPr/>
-              <a:lstStyle/>
-              <a:p>
-                <a:r>
-                  <a:rPr lang="zh-TW" altLang="en-US">
-                    <a:noFill/>
-                  </a:rPr>
-                  <a:t> </a:t>
-                </a:r>
-              </a:p>
-            </p:txBody>
-          </p:sp>
-        </mc:Fallback>
-      </mc:AlternateContent>
-      <mc:AlternateContent xmlns:mc="http://schemas.openxmlformats.org/markup-compatibility/2006" xmlns:a14="http://schemas.microsoft.com/office/drawing/2010/main">
-        <mc:Choice Requires="a14">
-          <p:sp>
-            <p:nvSpPr>
-              <p:cNvPr id="20" name="矩形 19">
-                <a:extLst>
-                  <a:ext uri="{FF2B5EF4-FFF2-40B4-BE49-F238E27FC236}">
-                    <a16:creationId xmlns:a16="http://schemas.microsoft.com/office/drawing/2014/main" id="{8C1AAF93-9D59-4319-85FA-DD0E840BF53C}"/>
-                  </a:ext>
-                </a:extLst>
-              </p:cNvPr>
-              <p:cNvSpPr/>
-              <p:nvPr/>
-            </p:nvSpPr>
-            <p:spPr>
-              <a:xfrm>
-                <a:off x="2242795" y="1915839"/>
-                <a:ext cx="963725" cy="400110"/>
-              </a:xfrm>
-              <a:prstGeom prst="rect">
-                <a:avLst/>
-              </a:prstGeom>
-            </p:spPr>
-            <p:txBody>
-              <a:bodyPr wrap="none">
-                <a:spAutoFit/>
-              </a:bodyPr>
-              <a:lstStyle/>
-              <a:p>
-                <a:pPr/>
-                <a14:m>
-                  <m:oMathPara xmlns:m="http://schemas.openxmlformats.org/officeDocument/2006/math">
-                    <m:oMathParaPr>
-                      <m:jc m:val="centerGroup"/>
-                    </m:oMathParaPr>
-                    <m:oMath xmlns:m="http://schemas.openxmlformats.org/officeDocument/2006/math">
-                      <m:r>
-                        <a:rPr lang="en-US" altLang="zh-TW" sz="2000" i="1">
-                          <a:latin typeface="Cambria Math" panose="02040503050406030204" pitchFamily="18" charset="0"/>
-                        </a:rPr>
-                        <m:t>𝑆</m:t>
-                      </m:r>
-                      <m:r>
-                        <a:rPr lang="en-US" altLang="zh-TW" sz="2000" i="1">
-                          <a:latin typeface="Cambria Math" panose="02040503050406030204" pitchFamily="18" charset="0"/>
-                        </a:rPr>
-                        <m:t>=</m:t>
-                      </m:r>
-                      <m:r>
-                        <a:rPr lang="en-US" altLang="zh-TW" sz="2000" i="1">
-                          <a:latin typeface="Cambria Math" panose="02040503050406030204" pitchFamily="18" charset="0"/>
-                        </a:rPr>
-                        <m:t>𝐾</m:t>
-                      </m:r>
-                      <m:r>
-                        <a:rPr lang="en-US" altLang="zh-TW" sz="2000" i="1">
-                          <a:latin typeface="Cambria Math" panose="02040503050406030204" pitchFamily="18" charset="0"/>
-                        </a:rPr>
-                        <m:t>′</m:t>
-                      </m:r>
-                    </m:oMath>
-                  </m:oMathPara>
-                </a14:m>
-                <a:endParaRPr lang="zh-TW" altLang="en-US" sz="2000" dirty="0"/>
-              </a:p>
-            </p:txBody>
-          </p:sp>
-        </mc:Choice>
-        <mc:Fallback xmlns="">
-          <p:sp>
-            <p:nvSpPr>
-              <p:cNvPr id="20" name="矩形 19">
-                <a:extLst>
-                  <a:ext uri="{FF2B5EF4-FFF2-40B4-BE49-F238E27FC236}">
-                    <a16:creationId xmlns:a16="http://schemas.microsoft.com/office/drawing/2014/main" id="{8C1AAF93-9D59-4319-85FA-DD0E840BF53C}"/>
-                  </a:ext>
-                </a:extLst>
-              </p:cNvPr>
-              <p:cNvSpPr>
-                <a:spLocks noRot="1" noChangeAspect="1" noMove="1" noResize="1" noEditPoints="1" noAdjustHandles="1" noChangeArrowheads="1" noChangeShapeType="1" noTextEdit="1"/>
-              </p:cNvSpPr>
-              <p:nvPr/>
-            </p:nvSpPr>
-            <p:spPr>
-              <a:xfrm>
-                <a:off x="2242795" y="1915839"/>
-                <a:ext cx="963725" cy="400110"/>
-              </a:xfrm>
-              <a:prstGeom prst="rect">
-                <a:avLst/>
-              </a:prstGeom>
-              <a:blipFill>
-                <a:blip r:embed="rId6"/>
-                <a:stretch>
-                  <a:fillRect/>
-                </a:stretch>
-              </a:blipFill>
-            </p:spPr>
-            <p:txBody>
-              <a:bodyPr/>
-              <a:lstStyle/>
-              <a:p>
-                <a:r>
-                  <a:rPr lang="zh-TW" altLang="en-US">
-                    <a:noFill/>
-                  </a:rPr>
-                  <a:t> </a:t>
-                </a:r>
-              </a:p>
-            </p:txBody>
-          </p:sp>
-        </mc:Fallback>
-      </mc:AlternateContent>
-      <p:sp>
-        <p:nvSpPr>
-          <p:cNvPr id="38" name="矩形 37">
-            <a:extLst>
-              <a:ext uri="{FF2B5EF4-FFF2-40B4-BE49-F238E27FC236}">
-                <a16:creationId xmlns:a16="http://schemas.microsoft.com/office/drawing/2014/main" id="{F28BAFE2-3078-4AA6-AADC-C1BA17E19EE5}"/>
-              </a:ext>
-            </a:extLst>
-          </p:cNvPr>
-          <p:cNvSpPr/>
-          <p:nvPr/>
-        </p:nvSpPr>
-        <p:spPr>
-          <a:xfrm>
-            <a:off x="3574204" y="61557"/>
-            <a:ext cx="1236236" cy="707886"/>
-          </a:xfrm>
-          <a:prstGeom prst="rect">
-            <a:avLst/>
-          </a:prstGeom>
-        </p:spPr>
-        <p:txBody>
-          <a:bodyPr wrap="none">
-            <a:spAutoFit/>
-          </a:bodyPr>
-          <a:lstStyle/>
-          <a:p>
-            <a:pPr algn="ctr"/>
-            <a:r>
-              <a:rPr lang="en-US" altLang="zh-TW" sz="2000" dirty="0">
-                <a:latin typeface="Times New Roman" panose="02020603050405020304" pitchFamily="18" charset="0"/>
-                <a:cs typeface="Times New Roman" panose="02020603050405020304" pitchFamily="18" charset="0"/>
-              </a:rPr>
-              <a:t>No</a:t>
-            </a:r>
-          </a:p>
-          <a:p>
-            <a:pPr algn="ctr"/>
-            <a:r>
-              <a:rPr lang="en-US" altLang="zh-TW" sz="2000" dirty="0">
-                <a:latin typeface="Times New Roman" panose="02020603050405020304" pitchFamily="18" charset="0"/>
-                <a:cs typeface="Times New Roman" panose="02020603050405020304" pitchFamily="18" charset="0"/>
-              </a:rPr>
-              <a:t>Excitation</a:t>
-            </a:r>
-            <a:endParaRPr lang="zh-TW" altLang="en-US" sz="2000" dirty="0">
-              <a:latin typeface="Times New Roman" panose="02020603050405020304" pitchFamily="18" charset="0"/>
-              <a:cs typeface="Times New Roman" panose="02020603050405020304" pitchFamily="18" charset="0"/>
-            </a:endParaRPr>
-          </a:p>
-        </p:txBody>
-      </p:sp>
-      <p:sp>
-        <p:nvSpPr>
-          <p:cNvPr id="26" name="矩形 25">
-            <a:extLst>
-              <a:ext uri="{FF2B5EF4-FFF2-40B4-BE49-F238E27FC236}">
-                <a16:creationId xmlns:a16="http://schemas.microsoft.com/office/drawing/2014/main" id="{8ADD2564-9B12-46F7-93CC-A526FAF20331}"/>
-              </a:ext>
-            </a:extLst>
-          </p:cNvPr>
-          <p:cNvSpPr/>
-          <p:nvPr/>
-        </p:nvSpPr>
-        <p:spPr>
-          <a:xfrm>
-            <a:off x="5906471" y="61557"/>
-            <a:ext cx="1236237" cy="707886"/>
-          </a:xfrm>
-          <a:prstGeom prst="rect">
-            <a:avLst/>
-          </a:prstGeom>
-        </p:spPr>
-        <p:txBody>
-          <a:bodyPr wrap="none">
-            <a:spAutoFit/>
-          </a:bodyPr>
-          <a:lstStyle/>
-          <a:p>
-            <a:pPr algn="ctr"/>
-            <a:r>
-              <a:rPr lang="en-US" altLang="zh-TW" sz="2000" dirty="0">
-                <a:latin typeface="Times New Roman" panose="02020603050405020304" pitchFamily="18" charset="0"/>
-                <a:cs typeface="Times New Roman" panose="02020603050405020304" pitchFamily="18" charset="0"/>
-              </a:rPr>
-              <a:t>No</a:t>
-            </a:r>
-          </a:p>
-          <a:p>
-            <a:pPr algn="ctr"/>
-            <a:r>
-              <a:rPr lang="en-US" altLang="zh-TW" sz="2000" dirty="0">
-                <a:latin typeface="Times New Roman" panose="02020603050405020304" pitchFamily="18" charset="0"/>
-                <a:cs typeface="Times New Roman" panose="02020603050405020304" pitchFamily="18" charset="0"/>
-              </a:rPr>
-              <a:t>Excitation</a:t>
-            </a:r>
-            <a:endParaRPr lang="zh-TW" altLang="en-US" sz="2000" dirty="0">
-              <a:latin typeface="Times New Roman" panose="02020603050405020304" pitchFamily="18" charset="0"/>
-              <a:cs typeface="Times New Roman" panose="02020603050405020304" pitchFamily="18" charset="0"/>
-            </a:endParaRPr>
-          </a:p>
-        </p:txBody>
-      </p:sp>
-    </p:spTree>
-    <p:extLst>
-      <p:ext uri="{BB962C8B-B14F-4D97-AF65-F5344CB8AC3E}">
-        <p14:creationId xmlns:p14="http://schemas.microsoft.com/office/powerpoint/2010/main" val="3915657363"/>
-      </p:ext>
-    </p:extLst>
-  </p:cSld>
-  <p:clrMapOvr>
-    <a:masterClrMapping/>
-  </p:clrMapOvr>
-</p:sld>
-</file>
-
-<file path=ppt/slides/slide2.xml><?xml version="1.0" encoding="utf-8"?>
 <p:sld xmlns:a="http://schemas.openxmlformats.org/drawingml/2006/main" xmlns:r="http://schemas.openxmlformats.org/officeDocument/2006/relationships" xmlns:p="http://schemas.openxmlformats.org/presentationml/2006/main" show="0">
   <p:cSld>
     <p:spTree>
@@ -6872,7 +4918,1106 @@
 </p:sld>
 </file>
 
-<file path=ppt/slides/slide3.xml><?xml version="1.0" encoding="utf-8"?>
+<file path=ppt/slides/slide10.xml><?xml version="1.0" encoding="utf-8"?>
+<p:sld xmlns:a="http://schemas.openxmlformats.org/drawingml/2006/main" xmlns:r="http://schemas.openxmlformats.org/officeDocument/2006/relationships" xmlns:p="http://schemas.openxmlformats.org/presentationml/2006/main" show="0">
+  <p:cSld>
+    <p:spTree>
+      <p:nvGrpSpPr>
+        <p:cNvPr id="1" name=""/>
+        <p:cNvGrpSpPr/>
+        <p:nvPr/>
+      </p:nvGrpSpPr>
+      <p:grpSpPr>
+        <a:xfrm>
+          <a:off x="0" y="0"/>
+          <a:ext cx="0" cy="0"/>
+          <a:chOff x="0" y="0"/>
+          <a:chExt cx="0" cy="0"/>
+        </a:xfrm>
+      </p:grpSpPr>
+      <p:sp>
+        <p:nvSpPr>
+          <p:cNvPr id="34" name="矩形: 圓角 33">
+            <a:extLst>
+              <a:ext uri="{FF2B5EF4-FFF2-40B4-BE49-F238E27FC236}">
+                <a16:creationId xmlns:a16="http://schemas.microsoft.com/office/drawing/2014/main" id="{3380EA81-C5F8-4D79-838A-1520DA874E3D}"/>
+              </a:ext>
+            </a:extLst>
+          </p:cNvPr>
+          <p:cNvSpPr/>
+          <p:nvPr/>
+        </p:nvSpPr>
+        <p:spPr>
+          <a:xfrm>
+            <a:off x="2144387" y="-1652527"/>
+            <a:ext cx="5617233" cy="5030638"/>
+          </a:xfrm>
+          <a:prstGeom prst="roundRect">
+            <a:avLst>
+              <a:gd name="adj" fmla="val 4125"/>
+            </a:avLst>
+          </a:prstGeom>
+          <a:gradFill flip="none" rotWithShape="1">
+            <a:gsLst>
+              <a:gs pos="0">
+                <a:schemeClr val="bg1">
+                  <a:lumMod val="95000"/>
+                </a:schemeClr>
+              </a:gs>
+              <a:gs pos="100000">
+                <a:schemeClr val="bg1">
+                  <a:lumMod val="85000"/>
+                </a:schemeClr>
+              </a:gs>
+            </a:gsLst>
+            <a:lin ang="5400000" scaled="1"/>
+            <a:tileRect/>
+          </a:gradFill>
+        </p:spPr>
+        <p:style>
+          <a:lnRef idx="1">
+            <a:schemeClr val="accent3"/>
+          </a:lnRef>
+          <a:fillRef idx="2">
+            <a:schemeClr val="accent3"/>
+          </a:fillRef>
+          <a:effectRef idx="1">
+            <a:schemeClr val="accent3"/>
+          </a:effectRef>
+          <a:fontRef idx="minor">
+            <a:schemeClr val="dk1"/>
+          </a:fontRef>
+        </p:style>
+        <p:txBody>
+          <a:bodyPr rot="0" spcFirstLastPara="0" vertOverflow="overflow" horzOverflow="overflow" vert="horz" wrap="square" lIns="37158" tIns="18579" rIns="37158" bIns="18579" numCol="1" spcCol="0" rtlCol="0" fromWordArt="0" anchor="ctr" anchorCtr="0" forceAA="0" compatLnSpc="1">
+            <a:prstTxWarp prst="textNoShape">
+              <a:avLst/>
+            </a:prstTxWarp>
+            <a:noAutofit/>
+          </a:bodyPr>
+          <a:lstStyle/>
+          <a:p>
+            <a:pPr algn="ctr"/>
+            <a:endParaRPr lang="zh-TW" altLang="en-US" sz="2000" dirty="0">
+              <a:latin typeface="Times New Roman" panose="02020603050405020304" pitchFamily="18" charset="0"/>
+              <a:cs typeface="Times New Roman" panose="02020603050405020304" pitchFamily="18" charset="0"/>
+            </a:endParaRPr>
+          </a:p>
+        </p:txBody>
+      </p:sp>
+      <p:sp>
+        <p:nvSpPr>
+          <p:cNvPr id="29" name="矩形: 圓角 28">
+            <a:extLst>
+              <a:ext uri="{FF2B5EF4-FFF2-40B4-BE49-F238E27FC236}">
+                <a16:creationId xmlns:a16="http://schemas.microsoft.com/office/drawing/2014/main" id="{8A063E4B-5939-4A6B-BBA1-577A84F295CD}"/>
+              </a:ext>
+            </a:extLst>
+          </p:cNvPr>
+          <p:cNvSpPr/>
+          <p:nvPr/>
+        </p:nvSpPr>
+        <p:spPr>
+          <a:xfrm>
+            <a:off x="3178175" y="-551046"/>
+            <a:ext cx="4445425" cy="3776843"/>
+          </a:xfrm>
+          <a:prstGeom prst="roundRect">
+            <a:avLst>
+              <a:gd name="adj" fmla="val 4125"/>
+            </a:avLst>
+          </a:prstGeom>
+          <a:gradFill flip="none" rotWithShape="1">
+            <a:gsLst>
+              <a:gs pos="100000">
+                <a:schemeClr val="bg1">
+                  <a:lumMod val="95000"/>
+                </a:schemeClr>
+              </a:gs>
+              <a:gs pos="0">
+                <a:schemeClr val="bg1">
+                  <a:lumMod val="85000"/>
+                </a:schemeClr>
+              </a:gs>
+            </a:gsLst>
+            <a:lin ang="5400000" scaled="1"/>
+            <a:tileRect/>
+          </a:gradFill>
+        </p:spPr>
+        <p:style>
+          <a:lnRef idx="1">
+            <a:schemeClr val="accent3"/>
+          </a:lnRef>
+          <a:fillRef idx="2">
+            <a:schemeClr val="accent3"/>
+          </a:fillRef>
+          <a:effectRef idx="1">
+            <a:schemeClr val="accent3"/>
+          </a:effectRef>
+          <a:fontRef idx="minor">
+            <a:schemeClr val="dk1"/>
+          </a:fontRef>
+        </p:style>
+        <p:txBody>
+          <a:bodyPr rot="0" spcFirstLastPara="0" vertOverflow="overflow" horzOverflow="overflow" vert="horz" wrap="square" lIns="37158" tIns="18579" rIns="37158" bIns="18579" numCol="1" spcCol="0" rtlCol="0" fromWordArt="0" anchor="ctr" anchorCtr="0" forceAA="0" compatLnSpc="1">
+            <a:prstTxWarp prst="textNoShape">
+              <a:avLst/>
+            </a:prstTxWarp>
+            <a:noAutofit/>
+          </a:bodyPr>
+          <a:lstStyle/>
+          <a:p>
+            <a:pPr algn="ctr"/>
+            <a:endParaRPr lang="zh-TW" altLang="en-US" sz="2000" dirty="0">
+              <a:latin typeface="Times New Roman" panose="02020603050405020304" pitchFamily="18" charset="0"/>
+              <a:cs typeface="Times New Roman" panose="02020603050405020304" pitchFamily="18" charset="0"/>
+            </a:endParaRPr>
+          </a:p>
+        </p:txBody>
+      </p:sp>
+      <p:pic>
+        <p:nvPicPr>
+          <p:cNvPr id="13" name="圖片 12">
+            <a:extLst>
+              <a:ext uri="{FF2B5EF4-FFF2-40B4-BE49-F238E27FC236}">
+                <a16:creationId xmlns:a16="http://schemas.microsoft.com/office/drawing/2014/main" id="{009B6563-DECD-4DFA-8D64-23AB9F9457C4}"/>
+              </a:ext>
+            </a:extLst>
+          </p:cNvPr>
+          <p:cNvPicPr>
+            <a:picLocks noChangeAspect="1"/>
+          </p:cNvPicPr>
+          <p:nvPr/>
+        </p:nvPicPr>
+        <p:blipFill rotWithShape="1">
+          <a:blip r:embed="rId2">
+            <a:clrChange>
+              <a:clrFrom>
+                <a:srgbClr val="FFFFFF"/>
+              </a:clrFrom>
+              <a:clrTo>
+                <a:srgbClr val="FFFFFF">
+                  <a:alpha val="0"/>
+                </a:srgbClr>
+              </a:clrTo>
+            </a:clrChange>
+            <a:extLst>
+              <a:ext uri="{28A0092B-C50C-407E-A947-70E740481C1C}">
+                <a14:useLocalDpi xmlns:a14="http://schemas.microsoft.com/office/drawing/2010/main" val="0"/>
+              </a:ext>
+            </a:extLst>
+          </a:blip>
+          <a:srcRect t="38616" b="10315"/>
+          <a:stretch/>
+        </p:blipFill>
+        <p:spPr>
+          <a:xfrm>
+            <a:off x="3145416" y="-364283"/>
+            <a:ext cx="2286000" cy="3502325"/>
+          </a:xfrm>
+          <a:prstGeom prst="rect">
+            <a:avLst/>
+          </a:prstGeom>
+        </p:spPr>
+      </p:pic>
+      <mc:AlternateContent xmlns:mc="http://schemas.openxmlformats.org/markup-compatibility/2006" xmlns:a14="http://schemas.microsoft.com/office/drawing/2010/main">
+        <mc:Choice Requires="a14">
+          <p:sp>
+            <p:nvSpPr>
+              <p:cNvPr id="8" name="矩形 7">
+                <a:extLst>
+                  <a:ext uri="{FF2B5EF4-FFF2-40B4-BE49-F238E27FC236}">
+                    <a16:creationId xmlns:a16="http://schemas.microsoft.com/office/drawing/2014/main" id="{F814741D-73B4-4BCC-A5CF-96247C4F6A0B}"/>
+                  </a:ext>
+                </a:extLst>
+              </p:cNvPr>
+              <p:cNvSpPr/>
+              <p:nvPr/>
+            </p:nvSpPr>
+            <p:spPr>
+              <a:xfrm>
+                <a:off x="3457533" y="-873341"/>
+                <a:ext cx="1393074" cy="611514"/>
+              </a:xfrm>
+              <a:prstGeom prst="rect">
+                <a:avLst/>
+              </a:prstGeom>
+            </p:spPr>
+            <p:txBody>
+              <a:bodyPr wrap="none">
+                <a:spAutoFit/>
+              </a:bodyPr>
+              <a:lstStyle/>
+              <a:p>
+                <a:pPr algn="r"/>
+                <a14:m>
+                  <m:oMathPara xmlns:m="http://schemas.openxmlformats.org/officeDocument/2006/math">
+                    <m:oMathParaPr>
+                      <m:jc m:val="centerGroup"/>
+                    </m:oMathParaPr>
+                    <m:oMath xmlns:m="http://schemas.openxmlformats.org/officeDocument/2006/math">
+                      <m:sSup>
+                        <m:sSupPr>
+                          <m:ctrlPr>
+                            <a:rPr lang="en-US" altLang="zh-TW" sz="2000" i="1">
+                              <a:latin typeface="Cambria Math" panose="02040503050406030204" pitchFamily="18" charset="0"/>
+                            </a:rPr>
+                          </m:ctrlPr>
+                        </m:sSupPr>
+                        <m:e>
+                          <m:d>
+                            <m:dPr>
+                              <m:begChr m:val="|"/>
+                              <m:endChr m:val="|"/>
+                              <m:ctrlPr>
+                                <a:rPr lang="en-US" altLang="zh-TW" sz="2000" i="1">
+                                  <a:latin typeface="Cambria Math" panose="02040503050406030204" pitchFamily="18" charset="0"/>
+                                </a:rPr>
+                              </m:ctrlPr>
+                            </m:dPr>
+                            <m:e>
+                              <m:sSubSup>
+                                <m:sSubSupPr>
+                                  <m:ctrlPr>
+                                    <a:rPr lang="en-US" altLang="zh-TW" sz="2000" i="1">
+                                      <a:latin typeface="Cambria Math" panose="02040503050406030204" pitchFamily="18" charset="0"/>
+                                    </a:rPr>
+                                  </m:ctrlPr>
+                                </m:sSubSupPr>
+                                <m:e>
+                                  <m:acc>
+                                    <m:accPr>
+                                      <m:chr m:val="̃"/>
+                                      <m:ctrlPr>
+                                        <a:rPr lang="en-US" altLang="zh-TW" sz="2000" i="1">
+                                          <a:latin typeface="Cambria Math" panose="02040503050406030204" pitchFamily="18" charset="0"/>
+                                        </a:rPr>
+                                      </m:ctrlPr>
+                                    </m:accPr>
+                                    <m:e>
+                                      <m:r>
+                                        <a:rPr lang="en-US" altLang="zh-TW" sz="2000" i="1">
+                                          <a:latin typeface="Cambria Math" panose="02040503050406030204" pitchFamily="18" charset="0"/>
+                                        </a:rPr>
+                                        <m:t>𝑀</m:t>
+                                      </m:r>
+                                    </m:e>
+                                  </m:acc>
+                                </m:e>
+                                <m:sub>
+                                  <m:r>
+                                    <a:rPr lang="en-US" altLang="zh-TW" sz="2000" i="1">
+                                      <a:latin typeface="Cambria Math" panose="02040503050406030204" pitchFamily="18" charset="0"/>
+                                    </a:rPr>
+                                    <m:t>𝑆</m:t>
+                                  </m:r>
+                                  <m:r>
+                                    <a:rPr lang="en-US" altLang="zh-TW" sz="2000" i="1">
+                                      <a:latin typeface="Cambria Math" panose="02040503050406030204" pitchFamily="18" charset="0"/>
+                                    </a:rPr>
+                                    <m:t>,</m:t>
+                                  </m:r>
+                                  <m:r>
+                                    <a:rPr lang="en-US" altLang="zh-TW" sz="2000" b="1" i="1">
+                                      <a:latin typeface="Cambria Math" panose="02040503050406030204" pitchFamily="18" charset="0"/>
+                                    </a:rPr>
+                                    <m:t>𝑸</m:t>
+                                  </m:r>
+                                </m:sub>
+                                <m:sup>
+                                  <m:acc>
+                                    <m:accPr>
+                                      <m:chr m:val="̂"/>
+                                      <m:ctrlPr>
+                                        <a:rPr lang="en-US" altLang="zh-TW" sz="2000" b="1" i="1">
+                                          <a:latin typeface="Cambria Math" panose="02040503050406030204" pitchFamily="18" charset="0"/>
+                                        </a:rPr>
+                                      </m:ctrlPr>
+                                    </m:accPr>
+                                    <m:e>
+                                      <m:r>
+                                        <a:rPr lang="en-US" altLang="zh-TW" sz="2000" b="1" i="1">
+                                          <a:latin typeface="Cambria Math" panose="02040503050406030204" pitchFamily="18" charset="0"/>
+                                        </a:rPr>
+                                        <m:t>𝒙</m:t>
+                                      </m:r>
+                                    </m:e>
+                                  </m:acc>
+                                  <m:r>
+                                    <a:rPr lang="en-US" altLang="zh-TW" sz="2000" i="1">
+                                      <a:latin typeface="Cambria Math" panose="02040503050406030204" pitchFamily="18" charset="0"/>
+                                    </a:rPr>
+                                    <m:t>−</m:t>
+                                  </m:r>
+                                  <m:r>
+                                    <a:rPr lang="en-US" altLang="zh-TW" sz="2000" i="1">
+                                      <a:latin typeface="Cambria Math" panose="02040503050406030204" pitchFamily="18" charset="0"/>
+                                    </a:rPr>
+                                    <m:t>𝑖</m:t>
+                                  </m:r>
+                                  <m:acc>
+                                    <m:accPr>
+                                      <m:chr m:val="̂"/>
+                                      <m:ctrlPr>
+                                        <a:rPr lang="en-US" altLang="zh-TW" sz="2000" b="1" i="1">
+                                          <a:latin typeface="Cambria Math" panose="02040503050406030204" pitchFamily="18" charset="0"/>
+                                        </a:rPr>
+                                      </m:ctrlPr>
+                                    </m:accPr>
+                                    <m:e>
+                                      <m:r>
+                                        <a:rPr lang="en-US" altLang="zh-TW" sz="2000" b="1" i="1">
+                                          <a:latin typeface="Cambria Math" panose="02040503050406030204" pitchFamily="18" charset="0"/>
+                                        </a:rPr>
+                                        <m:t>𝒚</m:t>
+                                      </m:r>
+                                    </m:e>
+                                  </m:acc>
+                                  <m:r>
+                                    <a:rPr lang="en-US" altLang="zh-TW" sz="2000" i="1">
+                                      <a:latin typeface="Cambria Math" panose="02040503050406030204" pitchFamily="18" charset="0"/>
+                                    </a:rPr>
+                                    <m:t>,1</m:t>
+                                  </m:r>
+                                </m:sup>
+                              </m:sSubSup>
+                            </m:e>
+                          </m:d>
+                        </m:e>
+                        <m:sup>
+                          <m:r>
+                            <a:rPr lang="en-US" altLang="zh-TW" sz="2000" i="1">
+                              <a:latin typeface="Cambria Math" panose="02040503050406030204" pitchFamily="18" charset="0"/>
+                            </a:rPr>
+                            <m:t>2</m:t>
+                          </m:r>
+                        </m:sup>
+                      </m:sSup>
+                      <m:r>
+                        <a:rPr lang="en-US" altLang="zh-TW" sz="2000" i="1">
+                          <a:latin typeface="Cambria Math" panose="02040503050406030204" pitchFamily="18" charset="0"/>
+                        </a:rPr>
+                        <m:t> </m:t>
+                      </m:r>
+                    </m:oMath>
+                  </m:oMathPara>
+                </a14:m>
+                <a:endParaRPr lang="zh-TW" altLang="en-US" sz="2000" dirty="0"/>
+              </a:p>
+            </p:txBody>
+          </p:sp>
+        </mc:Choice>
+        <mc:Fallback xmlns="">
+          <p:sp>
+            <p:nvSpPr>
+              <p:cNvPr id="8" name="矩形 7">
+                <a:extLst>
+                  <a:ext uri="{FF2B5EF4-FFF2-40B4-BE49-F238E27FC236}">
+                    <a16:creationId xmlns:a16="http://schemas.microsoft.com/office/drawing/2014/main" id="{F814741D-73B4-4BCC-A5CF-96247C4F6A0B}"/>
+                  </a:ext>
+                </a:extLst>
+              </p:cNvPr>
+              <p:cNvSpPr>
+                <a:spLocks noRot="1" noChangeAspect="1" noMove="1" noResize="1" noEditPoints="1" noAdjustHandles="1" noChangeArrowheads="1" noChangeShapeType="1" noTextEdit="1"/>
+              </p:cNvSpPr>
+              <p:nvPr/>
+            </p:nvSpPr>
+            <p:spPr>
+              <a:xfrm>
+                <a:off x="3457533" y="-873341"/>
+                <a:ext cx="1393074" cy="611514"/>
+              </a:xfrm>
+              <a:prstGeom prst="rect">
+                <a:avLst/>
+              </a:prstGeom>
+              <a:blipFill>
+                <a:blip r:embed="rId3"/>
+                <a:stretch>
+                  <a:fillRect/>
+                </a:stretch>
+              </a:blipFill>
+            </p:spPr>
+            <p:txBody>
+              <a:bodyPr/>
+              <a:lstStyle/>
+              <a:p>
+                <a:r>
+                  <a:rPr lang="zh-TW" altLang="en-US">
+                    <a:noFill/>
+                  </a:rPr>
+                  <a:t> </a:t>
+                </a:r>
+              </a:p>
+            </p:txBody>
+          </p:sp>
+        </mc:Fallback>
+      </mc:AlternateContent>
+      <mc:AlternateContent xmlns:mc="http://schemas.openxmlformats.org/markup-compatibility/2006" xmlns:a14="http://schemas.microsoft.com/office/drawing/2010/main">
+        <mc:Choice Requires="a14">
+          <p:sp>
+            <p:nvSpPr>
+              <p:cNvPr id="18" name="矩形 17">
+                <a:extLst>
+                  <a:ext uri="{FF2B5EF4-FFF2-40B4-BE49-F238E27FC236}">
+                    <a16:creationId xmlns:a16="http://schemas.microsoft.com/office/drawing/2014/main" id="{E18B0646-8D1C-436C-A556-9F6219308251}"/>
+                  </a:ext>
+                </a:extLst>
+              </p:cNvPr>
+              <p:cNvSpPr/>
+              <p:nvPr/>
+            </p:nvSpPr>
+            <p:spPr>
+              <a:xfrm>
+                <a:off x="5273956" y="-1034014"/>
+                <a:ext cx="2353786" cy="951351"/>
+              </a:xfrm>
+              <a:prstGeom prst="rect">
+                <a:avLst/>
+              </a:prstGeom>
+            </p:spPr>
+            <p:txBody>
+              <a:bodyPr wrap="none">
+                <a:spAutoFit/>
+              </a:bodyPr>
+              <a:lstStyle/>
+              <a:p>
+                <a:pPr/>
+                <a14:m>
+                  <m:oMathPara xmlns:m="http://schemas.openxmlformats.org/officeDocument/2006/math">
+                    <m:oMathParaPr>
+                      <m:jc m:val="centerGroup"/>
+                    </m:oMathParaPr>
+                    <m:oMath xmlns:m="http://schemas.openxmlformats.org/officeDocument/2006/math">
+                      <m:sSup>
+                        <m:sSupPr>
+                          <m:ctrlPr>
+                            <a:rPr lang="en-US" altLang="zh-TW" sz="2000" i="1" dirty="0">
+                              <a:latin typeface="Cambria Math" panose="02040503050406030204" pitchFamily="18" charset="0"/>
+                              <a:ea typeface="Cambria Math" panose="02040503050406030204" pitchFamily="18" charset="0"/>
+                            </a:rPr>
+                          </m:ctrlPr>
+                        </m:sSupPr>
+                        <m:e>
+                          <m:d>
+                            <m:dPr>
+                              <m:begChr m:val="|"/>
+                              <m:endChr m:val="|"/>
+                              <m:ctrlPr>
+                                <a:rPr lang="en-US" altLang="zh-TW" sz="2000" i="1" dirty="0">
+                                  <a:latin typeface="Cambria Math" panose="02040503050406030204" pitchFamily="18" charset="0"/>
+                                  <a:ea typeface="Cambria Math" panose="02040503050406030204" pitchFamily="18" charset="0"/>
+                                </a:rPr>
+                              </m:ctrlPr>
+                            </m:dPr>
+                            <m:e>
+                              <m:nary>
+                                <m:naryPr>
+                                  <m:chr m:val="∑"/>
+                                  <m:ctrlPr>
+                                    <a:rPr lang="en-US" altLang="zh-TW" sz="2000" i="1">
+                                      <a:latin typeface="Cambria Math" panose="02040503050406030204" pitchFamily="18" charset="0"/>
+                                    </a:rPr>
+                                  </m:ctrlPr>
+                                </m:naryPr>
+                                <m:sub>
+                                  <m:r>
+                                    <m:rPr>
+                                      <m:brk m:alnAt="23"/>
+                                    </m:rPr>
+                                    <a:rPr lang="en-US" altLang="zh-TW" sz="2000" b="1" i="1">
+                                      <a:latin typeface="Cambria Math" panose="02040503050406030204" pitchFamily="18" charset="0"/>
+                                    </a:rPr>
+                                    <m:t>𝑸</m:t>
+                                  </m:r>
+                                </m:sub>
+                                <m:sup>
+                                  <m:r>
+                                    <a:rPr lang="en-US" altLang="zh-TW" sz="2000" i="1">
+                                      <a:latin typeface="Cambria Math" panose="02040503050406030204" pitchFamily="18" charset="0"/>
+                                    </a:rPr>
+                                    <m:t> </m:t>
+                                  </m:r>
+                                </m:sup>
+                                <m:e>
+                                  <m:sSubSup>
+                                    <m:sSubSupPr>
+                                      <m:ctrlPr>
+                                        <a:rPr lang="en-US" altLang="zh-TW" sz="2000" i="1">
+                                          <a:latin typeface="Cambria Math" panose="02040503050406030204" pitchFamily="18" charset="0"/>
+                                        </a:rPr>
+                                      </m:ctrlPr>
+                                    </m:sSubSupPr>
+                                    <m:e>
+                                      <m:acc>
+                                        <m:accPr>
+                                          <m:chr m:val="̃"/>
+                                          <m:ctrlPr>
+                                            <a:rPr lang="en-US" altLang="zh-TW" sz="2000" i="1">
+                                              <a:latin typeface="Cambria Math" panose="02040503050406030204" pitchFamily="18" charset="0"/>
+                                            </a:rPr>
+                                          </m:ctrlPr>
+                                        </m:accPr>
+                                        <m:e>
+                                          <m:r>
+                                            <a:rPr lang="en-US" altLang="zh-TW" sz="2000" i="1">
+                                              <a:latin typeface="Cambria Math" panose="02040503050406030204" pitchFamily="18" charset="0"/>
+                                            </a:rPr>
+                                            <m:t>𝑀</m:t>
+                                          </m:r>
+                                        </m:e>
+                                      </m:acc>
+                                    </m:e>
+                                    <m:sub>
+                                      <m:r>
+                                        <a:rPr lang="en-US" altLang="zh-TW" sz="2000" i="1">
+                                          <a:latin typeface="Cambria Math" panose="02040503050406030204" pitchFamily="18" charset="0"/>
+                                        </a:rPr>
+                                        <m:t>𝑆</m:t>
+                                      </m:r>
+                                      <m:r>
+                                        <a:rPr lang="en-US" altLang="zh-TW" sz="2000" i="1">
+                                          <a:latin typeface="Cambria Math" panose="02040503050406030204" pitchFamily="18" charset="0"/>
+                                        </a:rPr>
+                                        <m:t>,</m:t>
+                                      </m:r>
+                                      <m:r>
+                                        <a:rPr lang="en-US" altLang="zh-TW" sz="2000" b="1" i="1">
+                                          <a:latin typeface="Cambria Math" panose="02040503050406030204" pitchFamily="18" charset="0"/>
+                                        </a:rPr>
+                                        <m:t>𝑸</m:t>
+                                      </m:r>
+                                    </m:sub>
+                                    <m:sup>
+                                      <m:acc>
+                                        <m:accPr>
+                                          <m:chr m:val="̂"/>
+                                          <m:ctrlPr>
+                                            <a:rPr lang="en-US" altLang="zh-TW" sz="2000" b="1" i="1">
+                                              <a:latin typeface="Cambria Math" panose="02040503050406030204" pitchFamily="18" charset="0"/>
+                                            </a:rPr>
+                                          </m:ctrlPr>
+                                        </m:accPr>
+                                        <m:e>
+                                          <m:r>
+                                            <a:rPr lang="en-US" altLang="zh-TW" sz="2000" b="1" i="1">
+                                              <a:latin typeface="Cambria Math" panose="02040503050406030204" pitchFamily="18" charset="0"/>
+                                            </a:rPr>
+                                            <m:t>𝒙</m:t>
+                                          </m:r>
+                                        </m:e>
+                                      </m:acc>
+                                      <m:r>
+                                        <a:rPr lang="en-US" altLang="zh-TW" sz="2000" i="1">
+                                          <a:latin typeface="Cambria Math" panose="02040503050406030204" pitchFamily="18" charset="0"/>
+                                        </a:rPr>
+                                        <m:t>−</m:t>
+                                      </m:r>
+                                      <m:r>
+                                        <a:rPr lang="en-US" altLang="zh-TW" sz="2000" i="1">
+                                          <a:latin typeface="Cambria Math" panose="02040503050406030204" pitchFamily="18" charset="0"/>
+                                        </a:rPr>
+                                        <m:t>𝑖</m:t>
+                                      </m:r>
+                                      <m:acc>
+                                        <m:accPr>
+                                          <m:chr m:val="̂"/>
+                                          <m:ctrlPr>
+                                            <a:rPr lang="en-US" altLang="zh-TW" sz="2000" b="1" i="1">
+                                              <a:latin typeface="Cambria Math" panose="02040503050406030204" pitchFamily="18" charset="0"/>
+                                            </a:rPr>
+                                          </m:ctrlPr>
+                                        </m:accPr>
+                                        <m:e>
+                                          <m:r>
+                                            <a:rPr lang="en-US" altLang="zh-TW" sz="2000" b="1" i="1">
+                                              <a:latin typeface="Cambria Math" panose="02040503050406030204" pitchFamily="18" charset="0"/>
+                                            </a:rPr>
+                                            <m:t>𝒚</m:t>
+                                          </m:r>
+                                        </m:e>
+                                      </m:acc>
+                                      <m:r>
+                                        <a:rPr lang="en-US" altLang="zh-TW" sz="2000" i="1" dirty="0">
+                                          <a:latin typeface="Cambria Math" panose="02040503050406030204" pitchFamily="18" charset="0"/>
+                                          <a:cs typeface="Times New Roman" panose="02020603050405020304" pitchFamily="18" charset="0"/>
+                                        </a:rPr>
+                                        <m:t>, 1</m:t>
+                                      </m:r>
+                                    </m:sup>
+                                  </m:sSubSup>
+                                  <m:sSup>
+                                    <m:sSupPr>
+                                      <m:ctrlPr>
+                                        <a:rPr lang="en-US" altLang="zh-TW" sz="2000" i="1" dirty="0">
+                                          <a:latin typeface="Cambria Math" panose="02040503050406030204" pitchFamily="18" charset="0"/>
+                                          <a:cs typeface="Times New Roman" panose="02020603050405020304" pitchFamily="18" charset="0"/>
+                                        </a:rPr>
+                                      </m:ctrlPr>
+                                    </m:sSupPr>
+                                    <m:e>
+                                      <m:r>
+                                        <a:rPr lang="en-US" altLang="zh-TW" sz="2000" i="1" dirty="0">
+                                          <a:latin typeface="Cambria Math" panose="02040503050406030204" pitchFamily="18" charset="0"/>
+                                          <a:cs typeface="Times New Roman" panose="02020603050405020304" pitchFamily="18" charset="0"/>
+                                        </a:rPr>
+                                        <m:t>𝑒</m:t>
+                                      </m:r>
+                                    </m:e>
+                                    <m:sup>
+                                      <m:r>
+                                        <a:rPr lang="en-US" altLang="zh-TW" sz="2000" i="1" dirty="0">
+                                          <a:latin typeface="Cambria Math" panose="02040503050406030204" pitchFamily="18" charset="0"/>
+                                          <a:cs typeface="Times New Roman" panose="02020603050405020304" pitchFamily="18" charset="0"/>
+                                        </a:rPr>
+                                        <m:t>𝑖</m:t>
+                                      </m:r>
+                                      <m:r>
+                                        <a:rPr lang="en-US" altLang="zh-TW" sz="2000" b="1" i="1" dirty="0">
+                                          <a:latin typeface="Cambria Math" panose="02040503050406030204" pitchFamily="18" charset="0"/>
+                                          <a:cs typeface="Times New Roman" panose="02020603050405020304" pitchFamily="18" charset="0"/>
+                                        </a:rPr>
+                                        <m:t>𝑸</m:t>
+                                      </m:r>
+                                      <m:r>
+                                        <a:rPr lang="en-US" altLang="zh-TW" sz="2000" i="1" dirty="0">
+                                          <a:latin typeface="Cambria Math" panose="02040503050406030204" pitchFamily="18" charset="0"/>
+                                          <a:cs typeface="Times New Roman" panose="02020603050405020304" pitchFamily="18" charset="0"/>
+                                        </a:rPr>
+                                        <m:t>⋅</m:t>
+                                      </m:r>
+                                      <m:sSub>
+                                        <m:sSubPr>
+                                          <m:ctrlPr>
+                                            <a:rPr lang="en-US" altLang="zh-TW" sz="2000" i="1" dirty="0">
+                                              <a:latin typeface="Cambria Math" panose="02040503050406030204" pitchFamily="18" charset="0"/>
+                                            </a:rPr>
+                                          </m:ctrlPr>
+                                        </m:sSubPr>
+                                        <m:e>
+                                          <m:r>
+                                            <a:rPr lang="en-US" altLang="zh-TW" sz="2000" b="1" i="1" dirty="0">
+                                              <a:latin typeface="Cambria Math" panose="02040503050406030204" pitchFamily="18" charset="0"/>
+                                            </a:rPr>
+                                            <m:t>𝑹</m:t>
+                                          </m:r>
+                                        </m:e>
+                                        <m:sub>
+                                          <m:r>
+                                            <a:rPr lang="en-US" altLang="zh-TW" sz="2000" i="1" dirty="0">
+                                              <a:latin typeface="Cambria Math" panose="02040503050406030204" pitchFamily="18" charset="0"/>
+                                            </a:rPr>
+                                            <m:t>𝑐</m:t>
+                                          </m:r>
+                                        </m:sub>
+                                      </m:sSub>
+                                    </m:sup>
+                                  </m:sSup>
+                                </m:e>
+                              </m:nary>
+                            </m:e>
+                          </m:d>
+                        </m:e>
+                        <m:sup>
+                          <m:r>
+                            <a:rPr lang="en-US" altLang="zh-TW" sz="2000" i="1" dirty="0">
+                              <a:latin typeface="Cambria Math" panose="02040503050406030204" pitchFamily="18" charset="0"/>
+                              <a:ea typeface="Cambria Math" panose="02040503050406030204" pitchFamily="18" charset="0"/>
+                            </a:rPr>
+                            <m:t>2</m:t>
+                          </m:r>
+                        </m:sup>
+                      </m:sSup>
+                    </m:oMath>
+                  </m:oMathPara>
+                </a14:m>
+                <a:endParaRPr lang="zh-TW" altLang="en-US" sz="2000" dirty="0"/>
+              </a:p>
+            </p:txBody>
+          </p:sp>
+        </mc:Choice>
+        <mc:Fallback xmlns="">
+          <p:sp>
+            <p:nvSpPr>
+              <p:cNvPr id="18" name="矩形 17">
+                <a:extLst>
+                  <a:ext uri="{FF2B5EF4-FFF2-40B4-BE49-F238E27FC236}">
+                    <a16:creationId xmlns:a16="http://schemas.microsoft.com/office/drawing/2014/main" id="{E18B0646-8D1C-436C-A556-9F6219308251}"/>
+                  </a:ext>
+                </a:extLst>
+              </p:cNvPr>
+              <p:cNvSpPr>
+                <a:spLocks noRot="1" noChangeAspect="1" noMove="1" noResize="1" noEditPoints="1" noAdjustHandles="1" noChangeArrowheads="1" noChangeShapeType="1" noTextEdit="1"/>
+              </p:cNvSpPr>
+              <p:nvPr/>
+            </p:nvSpPr>
+            <p:spPr>
+              <a:xfrm>
+                <a:off x="5273956" y="-1034014"/>
+                <a:ext cx="2353786" cy="951351"/>
+              </a:xfrm>
+              <a:prstGeom prst="rect">
+                <a:avLst/>
+              </a:prstGeom>
+              <a:blipFill>
+                <a:blip r:embed="rId4"/>
+                <a:stretch>
+                  <a:fillRect/>
+                </a:stretch>
+              </a:blipFill>
+            </p:spPr>
+            <p:txBody>
+              <a:bodyPr/>
+              <a:lstStyle/>
+              <a:p>
+                <a:r>
+                  <a:rPr lang="zh-TW" altLang="en-US">
+                    <a:noFill/>
+                  </a:rPr>
+                  <a:t> </a:t>
+                </a:r>
+              </a:p>
+            </p:txBody>
+          </p:sp>
+        </mc:Fallback>
+      </mc:AlternateContent>
+      <mc:AlternateContent xmlns:mc="http://schemas.openxmlformats.org/markup-compatibility/2006" xmlns:a14="http://schemas.microsoft.com/office/drawing/2010/main">
+        <mc:Choice Requires="a14">
+          <p:sp>
+            <p:nvSpPr>
+              <p:cNvPr id="19" name="矩形 18">
+                <a:extLst>
+                  <a:ext uri="{FF2B5EF4-FFF2-40B4-BE49-F238E27FC236}">
+                    <a16:creationId xmlns:a16="http://schemas.microsoft.com/office/drawing/2014/main" id="{724B1F99-7073-4C1C-ACB8-889E61687D54}"/>
+                  </a:ext>
+                </a:extLst>
+              </p:cNvPr>
+              <p:cNvSpPr/>
+              <p:nvPr/>
+            </p:nvSpPr>
+            <p:spPr>
+              <a:xfrm>
+                <a:off x="2271779" y="312501"/>
+                <a:ext cx="905761" cy="400110"/>
+              </a:xfrm>
+              <a:prstGeom prst="rect">
+                <a:avLst/>
+              </a:prstGeom>
+            </p:spPr>
+            <p:txBody>
+              <a:bodyPr wrap="none">
+                <a:spAutoFit/>
+              </a:bodyPr>
+              <a:lstStyle/>
+              <a:p>
+                <a:pPr/>
+                <a14:m>
+                  <m:oMathPara xmlns:m="http://schemas.openxmlformats.org/officeDocument/2006/math">
+                    <m:oMathParaPr>
+                      <m:jc m:val="centerGroup"/>
+                    </m:oMathParaPr>
+                    <m:oMath xmlns:m="http://schemas.openxmlformats.org/officeDocument/2006/math">
+                      <m:r>
+                        <a:rPr lang="en-US" altLang="zh-TW" sz="2000" i="1">
+                          <a:latin typeface="Cambria Math" panose="02040503050406030204" pitchFamily="18" charset="0"/>
+                        </a:rPr>
+                        <m:t>𝑆</m:t>
+                      </m:r>
+                      <m:r>
+                        <a:rPr lang="en-US" altLang="zh-TW" sz="2000" i="1">
+                          <a:latin typeface="Cambria Math" panose="02040503050406030204" pitchFamily="18" charset="0"/>
+                        </a:rPr>
+                        <m:t>=</m:t>
+                      </m:r>
+                      <m:r>
+                        <a:rPr lang="en-US" altLang="zh-TW" sz="2000" i="1">
+                          <a:latin typeface="Cambria Math" panose="02040503050406030204" pitchFamily="18" charset="0"/>
+                        </a:rPr>
+                        <m:t>𝐾</m:t>
+                      </m:r>
+                    </m:oMath>
+                  </m:oMathPara>
+                </a14:m>
+                <a:endParaRPr lang="zh-TW" altLang="en-US" sz="2000" dirty="0"/>
+              </a:p>
+            </p:txBody>
+          </p:sp>
+        </mc:Choice>
+        <mc:Fallback xmlns="">
+          <p:sp>
+            <p:nvSpPr>
+              <p:cNvPr id="19" name="矩形 18">
+                <a:extLst>
+                  <a:ext uri="{FF2B5EF4-FFF2-40B4-BE49-F238E27FC236}">
+                    <a16:creationId xmlns:a16="http://schemas.microsoft.com/office/drawing/2014/main" id="{724B1F99-7073-4C1C-ACB8-889E61687D54}"/>
+                  </a:ext>
+                </a:extLst>
+              </p:cNvPr>
+              <p:cNvSpPr>
+                <a:spLocks noRot="1" noChangeAspect="1" noMove="1" noResize="1" noEditPoints="1" noAdjustHandles="1" noChangeArrowheads="1" noChangeShapeType="1" noTextEdit="1"/>
+              </p:cNvSpPr>
+              <p:nvPr/>
+            </p:nvSpPr>
+            <p:spPr>
+              <a:xfrm>
+                <a:off x="2271779" y="312501"/>
+                <a:ext cx="905761" cy="400110"/>
+              </a:xfrm>
+              <a:prstGeom prst="rect">
+                <a:avLst/>
+              </a:prstGeom>
+              <a:blipFill>
+                <a:blip r:embed="rId5"/>
+                <a:stretch>
+                  <a:fillRect/>
+                </a:stretch>
+              </a:blipFill>
+            </p:spPr>
+            <p:txBody>
+              <a:bodyPr/>
+              <a:lstStyle/>
+              <a:p>
+                <a:r>
+                  <a:rPr lang="zh-TW" altLang="en-US">
+                    <a:noFill/>
+                  </a:rPr>
+                  <a:t> </a:t>
+                </a:r>
+              </a:p>
+            </p:txBody>
+          </p:sp>
+        </mc:Fallback>
+      </mc:AlternateContent>
+      <mc:AlternateContent xmlns:mc="http://schemas.openxmlformats.org/markup-compatibility/2006" xmlns:a14="http://schemas.microsoft.com/office/drawing/2010/main">
+        <mc:Choice Requires="a14">
+          <p:sp>
+            <p:nvSpPr>
+              <p:cNvPr id="20" name="矩形 19">
+                <a:extLst>
+                  <a:ext uri="{FF2B5EF4-FFF2-40B4-BE49-F238E27FC236}">
+                    <a16:creationId xmlns:a16="http://schemas.microsoft.com/office/drawing/2014/main" id="{8C1AAF93-9D59-4319-85FA-DD0E840BF53C}"/>
+                  </a:ext>
+                </a:extLst>
+              </p:cNvPr>
+              <p:cNvSpPr/>
+              <p:nvPr/>
+            </p:nvSpPr>
+            <p:spPr>
+              <a:xfrm>
+                <a:off x="2242795" y="1915839"/>
+                <a:ext cx="963725" cy="400110"/>
+              </a:xfrm>
+              <a:prstGeom prst="rect">
+                <a:avLst/>
+              </a:prstGeom>
+            </p:spPr>
+            <p:txBody>
+              <a:bodyPr wrap="none">
+                <a:spAutoFit/>
+              </a:bodyPr>
+              <a:lstStyle/>
+              <a:p>
+                <a:pPr/>
+                <a14:m>
+                  <m:oMathPara xmlns:m="http://schemas.openxmlformats.org/officeDocument/2006/math">
+                    <m:oMathParaPr>
+                      <m:jc m:val="centerGroup"/>
+                    </m:oMathParaPr>
+                    <m:oMath xmlns:m="http://schemas.openxmlformats.org/officeDocument/2006/math">
+                      <m:r>
+                        <a:rPr lang="en-US" altLang="zh-TW" sz="2000" i="1">
+                          <a:latin typeface="Cambria Math" panose="02040503050406030204" pitchFamily="18" charset="0"/>
+                        </a:rPr>
+                        <m:t>𝑆</m:t>
+                      </m:r>
+                      <m:r>
+                        <a:rPr lang="en-US" altLang="zh-TW" sz="2000" i="1">
+                          <a:latin typeface="Cambria Math" panose="02040503050406030204" pitchFamily="18" charset="0"/>
+                        </a:rPr>
+                        <m:t>=</m:t>
+                      </m:r>
+                      <m:r>
+                        <a:rPr lang="en-US" altLang="zh-TW" sz="2000" i="1">
+                          <a:latin typeface="Cambria Math" panose="02040503050406030204" pitchFamily="18" charset="0"/>
+                        </a:rPr>
+                        <m:t>𝐾</m:t>
+                      </m:r>
+                      <m:r>
+                        <a:rPr lang="en-US" altLang="zh-TW" sz="2000" i="1">
+                          <a:latin typeface="Cambria Math" panose="02040503050406030204" pitchFamily="18" charset="0"/>
+                        </a:rPr>
+                        <m:t>′</m:t>
+                      </m:r>
+                    </m:oMath>
+                  </m:oMathPara>
+                </a14:m>
+                <a:endParaRPr lang="zh-TW" altLang="en-US" sz="2000" dirty="0"/>
+              </a:p>
+            </p:txBody>
+          </p:sp>
+        </mc:Choice>
+        <mc:Fallback xmlns="">
+          <p:sp>
+            <p:nvSpPr>
+              <p:cNvPr id="20" name="矩形 19">
+                <a:extLst>
+                  <a:ext uri="{FF2B5EF4-FFF2-40B4-BE49-F238E27FC236}">
+                    <a16:creationId xmlns:a16="http://schemas.microsoft.com/office/drawing/2014/main" id="{8C1AAF93-9D59-4319-85FA-DD0E840BF53C}"/>
+                  </a:ext>
+                </a:extLst>
+              </p:cNvPr>
+              <p:cNvSpPr>
+                <a:spLocks noRot="1" noChangeAspect="1" noMove="1" noResize="1" noEditPoints="1" noAdjustHandles="1" noChangeArrowheads="1" noChangeShapeType="1" noTextEdit="1"/>
+              </p:cNvSpPr>
+              <p:nvPr/>
+            </p:nvSpPr>
+            <p:spPr>
+              <a:xfrm>
+                <a:off x="2242795" y="1915839"/>
+                <a:ext cx="963725" cy="400110"/>
+              </a:xfrm>
+              <a:prstGeom prst="rect">
+                <a:avLst/>
+              </a:prstGeom>
+              <a:blipFill>
+                <a:blip r:embed="rId6"/>
+                <a:stretch>
+                  <a:fillRect/>
+                </a:stretch>
+              </a:blipFill>
+            </p:spPr>
+            <p:txBody>
+              <a:bodyPr/>
+              <a:lstStyle/>
+              <a:p>
+                <a:r>
+                  <a:rPr lang="zh-TW" altLang="en-US">
+                    <a:noFill/>
+                  </a:rPr>
+                  <a:t> </a:t>
+                </a:r>
+              </a:p>
+            </p:txBody>
+          </p:sp>
+        </mc:Fallback>
+      </mc:AlternateContent>
+      <p:sp>
+        <p:nvSpPr>
+          <p:cNvPr id="38" name="矩形 37">
+            <a:extLst>
+              <a:ext uri="{FF2B5EF4-FFF2-40B4-BE49-F238E27FC236}">
+                <a16:creationId xmlns:a16="http://schemas.microsoft.com/office/drawing/2014/main" id="{F28BAFE2-3078-4AA6-AADC-C1BA17E19EE5}"/>
+              </a:ext>
+            </a:extLst>
+          </p:cNvPr>
+          <p:cNvSpPr/>
+          <p:nvPr/>
+        </p:nvSpPr>
+        <p:spPr>
+          <a:xfrm>
+            <a:off x="3574204" y="61557"/>
+            <a:ext cx="1236236" cy="707886"/>
+          </a:xfrm>
+          <a:prstGeom prst="rect">
+            <a:avLst/>
+          </a:prstGeom>
+        </p:spPr>
+        <p:txBody>
+          <a:bodyPr wrap="none">
+            <a:spAutoFit/>
+          </a:bodyPr>
+          <a:lstStyle/>
+          <a:p>
+            <a:pPr algn="ctr"/>
+            <a:r>
+              <a:rPr lang="en-US" altLang="zh-TW" sz="2000" dirty="0">
+                <a:latin typeface="Times New Roman" panose="02020603050405020304" pitchFamily="18" charset="0"/>
+                <a:cs typeface="Times New Roman" panose="02020603050405020304" pitchFamily="18" charset="0"/>
+              </a:rPr>
+              <a:t>No</a:t>
+            </a:r>
+          </a:p>
+          <a:p>
+            <a:pPr algn="ctr"/>
+            <a:r>
+              <a:rPr lang="en-US" altLang="zh-TW" sz="2000" dirty="0">
+                <a:latin typeface="Times New Roman" panose="02020603050405020304" pitchFamily="18" charset="0"/>
+                <a:cs typeface="Times New Roman" panose="02020603050405020304" pitchFamily="18" charset="0"/>
+              </a:rPr>
+              <a:t>Excitation</a:t>
+            </a:r>
+            <a:endParaRPr lang="zh-TW" altLang="en-US" sz="2000" dirty="0">
+              <a:latin typeface="Times New Roman" panose="02020603050405020304" pitchFamily="18" charset="0"/>
+              <a:cs typeface="Times New Roman" panose="02020603050405020304" pitchFamily="18" charset="0"/>
+            </a:endParaRPr>
+          </a:p>
+        </p:txBody>
+      </p:sp>
+      <p:sp>
+        <p:nvSpPr>
+          <p:cNvPr id="26" name="矩形 25">
+            <a:extLst>
+              <a:ext uri="{FF2B5EF4-FFF2-40B4-BE49-F238E27FC236}">
+                <a16:creationId xmlns:a16="http://schemas.microsoft.com/office/drawing/2014/main" id="{8ADD2564-9B12-46F7-93CC-A526FAF20331}"/>
+              </a:ext>
+            </a:extLst>
+          </p:cNvPr>
+          <p:cNvSpPr/>
+          <p:nvPr/>
+        </p:nvSpPr>
+        <p:spPr>
+          <a:xfrm>
+            <a:off x="5906471" y="61557"/>
+            <a:ext cx="1236237" cy="707886"/>
+          </a:xfrm>
+          <a:prstGeom prst="rect">
+            <a:avLst/>
+          </a:prstGeom>
+        </p:spPr>
+        <p:txBody>
+          <a:bodyPr wrap="none">
+            <a:spAutoFit/>
+          </a:bodyPr>
+          <a:lstStyle/>
+          <a:p>
+            <a:pPr algn="ctr"/>
+            <a:r>
+              <a:rPr lang="en-US" altLang="zh-TW" sz="2000" dirty="0">
+                <a:latin typeface="Times New Roman" panose="02020603050405020304" pitchFamily="18" charset="0"/>
+                <a:cs typeface="Times New Roman" panose="02020603050405020304" pitchFamily="18" charset="0"/>
+              </a:rPr>
+              <a:t>No</a:t>
+            </a:r>
+          </a:p>
+          <a:p>
+            <a:pPr algn="ctr"/>
+            <a:r>
+              <a:rPr lang="en-US" altLang="zh-TW" sz="2000" dirty="0">
+                <a:latin typeface="Times New Roman" panose="02020603050405020304" pitchFamily="18" charset="0"/>
+                <a:cs typeface="Times New Roman" panose="02020603050405020304" pitchFamily="18" charset="0"/>
+              </a:rPr>
+              <a:t>Excitation</a:t>
+            </a:r>
+            <a:endParaRPr lang="zh-TW" altLang="en-US" sz="2000" dirty="0">
+              <a:latin typeface="Times New Roman" panose="02020603050405020304" pitchFamily="18" charset="0"/>
+              <a:cs typeface="Times New Roman" panose="02020603050405020304" pitchFamily="18" charset="0"/>
+            </a:endParaRPr>
+          </a:p>
+        </p:txBody>
+      </p:sp>
+    </p:spTree>
+    <p:extLst>
+      <p:ext uri="{BB962C8B-B14F-4D97-AF65-F5344CB8AC3E}">
+        <p14:creationId xmlns:p14="http://schemas.microsoft.com/office/powerpoint/2010/main" val="3915657363"/>
+      </p:ext>
+    </p:extLst>
+  </p:cSld>
+  <p:clrMapOvr>
+    <a:masterClrMapping/>
+  </p:clrMapOvr>
+</p:sld>
+</file>
+
+<file path=ppt/slides/slide2.xml><?xml version="1.0" encoding="utf-8"?>
 <p:sld xmlns:a="http://schemas.openxmlformats.org/drawingml/2006/main" xmlns:r="http://schemas.openxmlformats.org/officeDocument/2006/relationships" xmlns:p="http://schemas.openxmlformats.org/presentationml/2006/main" show="0">
   <p:cSld>
     <p:spTree>
@@ -7897,7 +7042,7 @@
 </p:sld>
 </file>
 
-<file path=ppt/slides/slide4.xml><?xml version="1.0" encoding="utf-8"?>
+<file path=ppt/slides/slide3.xml><?xml version="1.0" encoding="utf-8"?>
 <p:sld xmlns:a="http://schemas.openxmlformats.org/drawingml/2006/main" xmlns:r="http://schemas.openxmlformats.org/officeDocument/2006/relationships" xmlns:p="http://schemas.openxmlformats.org/presentationml/2006/main" show="0">
   <p:cSld>
     <p:spTree>
@@ -9041,7 +8186,7 @@
 </p:sld>
 </file>
 
-<file path=ppt/slides/slide5.xml><?xml version="1.0" encoding="utf-8"?>
+<file path=ppt/slides/slide4.xml><?xml version="1.0" encoding="utf-8"?>
 <p:sld xmlns:a="http://schemas.openxmlformats.org/drawingml/2006/main" xmlns:r="http://schemas.openxmlformats.org/officeDocument/2006/relationships" xmlns:p="http://schemas.openxmlformats.org/presentationml/2006/main" show="0">
   <p:cSld>
     <p:spTree>
@@ -10185,8 +9330,8 @@
 </p:sld>
 </file>
 
-<file path=ppt/slides/slide6.xml><?xml version="1.0" encoding="utf-8"?>
-<p:sld xmlns:a="http://schemas.openxmlformats.org/drawingml/2006/main" xmlns:r="http://schemas.openxmlformats.org/officeDocument/2006/relationships" xmlns:p="http://schemas.openxmlformats.org/presentationml/2006/main">
+<file path=ppt/slides/slide5.xml><?xml version="1.0" encoding="utf-8"?>
+<p:sld xmlns:a="http://schemas.openxmlformats.org/drawingml/2006/main" xmlns:r="http://schemas.openxmlformats.org/officeDocument/2006/relationships" xmlns:p="http://schemas.openxmlformats.org/presentationml/2006/main" show="0">
   <p:cSld>
     <p:spTree>
       <p:nvGrpSpPr>
@@ -10353,8 +9498,8 @@
               </p:nvSpPr>
               <p:spPr>
                 <a:xfrm>
-                  <a:off x="3119089" y="1512836"/>
-                  <a:ext cx="2034468" cy="500522"/>
+                  <a:off x="3255346" y="1512836"/>
+                  <a:ext cx="1898212" cy="500522"/>
                 </a:xfrm>
                 <a:prstGeom prst="rect">
                   <a:avLst/>
@@ -10426,7 +9571,7 @@
                                       <a:rPr lang="en-US" altLang="zh-TW" sz="2000" b="0" i="1" smtClean="0">
                                         <a:latin typeface="Cambria Math" panose="02040503050406030204" pitchFamily="18" charset="0"/>
                                       </a:rPr>
-                                      <m:t>±1</m:t>
+                                      <m:t>0</m:t>
                                     </m:r>
                                     <m:r>
                                       <a:rPr lang="en-US" altLang="zh-TW" sz="2000" i="1" dirty="0">
@@ -10546,8 +9691,8 @@
               </p:nvSpPr>
               <p:spPr>
                 <a:xfrm>
-                  <a:off x="3119089" y="1512836"/>
-                  <a:ext cx="2034468" cy="500522"/>
+                  <a:off x="3255346" y="1512836"/>
+                  <a:ext cx="1898212" cy="500522"/>
                 </a:xfrm>
                 <a:prstGeom prst="rect">
                   <a:avLst/>
@@ -11052,6 +10197,663 @@
     <p:extLst>
       <p:ext uri="{BB962C8B-B14F-4D97-AF65-F5344CB8AC3E}">
         <p14:creationId xmlns:p14="http://schemas.microsoft.com/office/powerpoint/2010/main" val="3399321571"/>
+      </p:ext>
+    </p:extLst>
+  </p:cSld>
+  <p:clrMapOvr>
+    <a:masterClrMapping/>
+  </p:clrMapOvr>
+</p:sld>
+</file>
+
+<file path=ppt/slides/slide6.xml><?xml version="1.0" encoding="utf-8"?>
+<p:sld xmlns:a="http://schemas.openxmlformats.org/drawingml/2006/main" xmlns:r="http://schemas.openxmlformats.org/officeDocument/2006/relationships" xmlns:p="http://schemas.openxmlformats.org/presentationml/2006/main">
+  <p:cSld>
+    <p:spTree>
+      <p:nvGrpSpPr>
+        <p:cNvPr id="1" name=""/>
+        <p:cNvGrpSpPr/>
+        <p:nvPr/>
+      </p:nvGrpSpPr>
+      <p:grpSpPr>
+        <a:xfrm>
+          <a:off x="0" y="0"/>
+          <a:ext cx="0" cy="0"/>
+          <a:chOff x="0" y="0"/>
+          <a:chExt cx="0" cy="0"/>
+        </a:xfrm>
+      </p:grpSpPr>
+      <p:sp>
+        <p:nvSpPr>
+          <p:cNvPr id="36" name="矩形: 圓角 35">
+            <a:extLst>
+              <a:ext uri="{FF2B5EF4-FFF2-40B4-BE49-F238E27FC236}">
+                <a16:creationId xmlns:a16="http://schemas.microsoft.com/office/drawing/2014/main" id="{E60C8961-39A3-406D-BBF9-2931EAC49EEF}"/>
+              </a:ext>
+            </a:extLst>
+          </p:cNvPr>
+          <p:cNvSpPr/>
+          <p:nvPr/>
+        </p:nvSpPr>
+        <p:spPr>
+          <a:xfrm>
+            <a:off x="2723646" y="29601"/>
+            <a:ext cx="4458717" cy="1741367"/>
+          </a:xfrm>
+          <a:prstGeom prst="roundRect">
+            <a:avLst>
+              <a:gd name="adj" fmla="val 4125"/>
+            </a:avLst>
+          </a:prstGeom>
+          <a:gradFill flip="none" rotWithShape="1">
+            <a:gsLst>
+              <a:gs pos="0">
+                <a:schemeClr val="bg1">
+                  <a:lumMod val="95000"/>
+                </a:schemeClr>
+              </a:gs>
+              <a:gs pos="100000">
+                <a:schemeClr val="bg1">
+                  <a:lumMod val="95000"/>
+                </a:schemeClr>
+              </a:gs>
+            </a:gsLst>
+            <a:lin ang="5400000" scaled="1"/>
+            <a:tileRect/>
+          </a:gradFill>
+        </p:spPr>
+        <p:style>
+          <a:lnRef idx="1">
+            <a:schemeClr val="accent3"/>
+          </a:lnRef>
+          <a:fillRef idx="2">
+            <a:schemeClr val="accent3"/>
+          </a:fillRef>
+          <a:effectRef idx="1">
+            <a:schemeClr val="accent3"/>
+          </a:effectRef>
+          <a:fontRef idx="minor">
+            <a:schemeClr val="dk1"/>
+          </a:fontRef>
+        </p:style>
+        <p:txBody>
+          <a:bodyPr rot="0" spcFirstLastPara="0" vertOverflow="overflow" horzOverflow="overflow" vert="horz" wrap="square" lIns="37158" tIns="18579" rIns="37158" bIns="18579" numCol="1" spcCol="0" rtlCol="0" fromWordArt="0" anchor="ctr" anchorCtr="0" forceAA="0" compatLnSpc="1">
+            <a:prstTxWarp prst="textNoShape">
+              <a:avLst/>
+            </a:prstTxWarp>
+            <a:noAutofit/>
+          </a:bodyPr>
+          <a:lstStyle/>
+          <a:p>
+            <a:pPr algn="ctr"/>
+            <a:endParaRPr lang="zh-TW" altLang="en-US" sz="731" dirty="0">
+              <a:latin typeface="Times New Roman" panose="02020603050405020304" pitchFamily="18" charset="0"/>
+              <a:cs typeface="Times New Roman" panose="02020603050405020304" pitchFamily="18" charset="0"/>
+            </a:endParaRPr>
+          </a:p>
+        </p:txBody>
+      </p:sp>
+      <p:pic>
+        <p:nvPicPr>
+          <p:cNvPr id="12" name="圖片 11">
+            <a:extLst>
+              <a:ext uri="{FF2B5EF4-FFF2-40B4-BE49-F238E27FC236}">
+                <a16:creationId xmlns:a16="http://schemas.microsoft.com/office/drawing/2014/main" id="{CF4C0578-88F8-42BB-B9E4-F95E516E2655}"/>
+              </a:ext>
+            </a:extLst>
+          </p:cNvPr>
+          <p:cNvPicPr>
+            <a:picLocks noChangeAspect="1"/>
+          </p:cNvPicPr>
+          <p:nvPr/>
+        </p:nvPicPr>
+        <p:blipFill rotWithShape="1">
+          <a:blip r:embed="rId2">
+            <a:clrChange>
+              <a:clrFrom>
+                <a:srgbClr val="FFFFFF"/>
+              </a:clrFrom>
+              <a:clrTo>
+                <a:srgbClr val="FFFFFF">
+                  <a:alpha val="0"/>
+                </a:srgbClr>
+              </a:clrTo>
+            </a:clrChange>
+            <a:extLst>
+              <a:ext uri="{28A0092B-C50C-407E-A947-70E740481C1C}">
+                <a14:useLocalDpi xmlns:a14="http://schemas.microsoft.com/office/drawing/2010/main" val="0"/>
+              </a:ext>
+            </a:extLst>
+          </a:blip>
+          <a:srcRect l="9861" t="11602" r="1805" b="64731"/>
+          <a:stretch/>
+        </p:blipFill>
+        <p:spPr>
+          <a:xfrm>
+            <a:off x="5136894" y="62765"/>
+            <a:ext cx="2019301" cy="1623060"/>
+          </a:xfrm>
+          <a:prstGeom prst="rect">
+            <a:avLst/>
+          </a:prstGeom>
+        </p:spPr>
+      </p:pic>
+      <mc:AlternateContent xmlns:mc="http://schemas.openxmlformats.org/markup-compatibility/2006" xmlns:a14="http://schemas.microsoft.com/office/drawing/2010/main">
+        <mc:Choice Requires="a14">
+          <p:sp>
+            <p:nvSpPr>
+              <p:cNvPr id="39" name="文字方塊 38">
+                <a:extLst>
+                  <a:ext uri="{FF2B5EF4-FFF2-40B4-BE49-F238E27FC236}">
+                    <a16:creationId xmlns:a16="http://schemas.microsoft.com/office/drawing/2014/main" id="{B2DDAB2F-1594-4FFB-83A0-D06118A518FB}"/>
+                  </a:ext>
+                </a:extLst>
+              </p:cNvPr>
+              <p:cNvSpPr txBox="1"/>
+              <p:nvPr/>
+            </p:nvSpPr>
+            <p:spPr>
+              <a:xfrm>
+                <a:off x="5092380" y="1205477"/>
+                <a:ext cx="830594" cy="400110"/>
+              </a:xfrm>
+              <a:prstGeom prst="rect">
+                <a:avLst/>
+              </a:prstGeom>
+              <a:noFill/>
+            </p:spPr>
+            <p:txBody>
+              <a:bodyPr wrap="square" rtlCol="0">
+                <a:spAutoFit/>
+              </a:bodyPr>
+              <a:lstStyle/>
+              <a:p>
+                <a:pPr/>
+                <a14:m>
+                  <m:oMathPara xmlns:m="http://schemas.openxmlformats.org/officeDocument/2006/math">
+                    <m:oMathParaPr>
+                      <m:jc m:val="centerGroup"/>
+                    </m:oMathParaPr>
+                    <m:oMath xmlns:m="http://schemas.openxmlformats.org/officeDocument/2006/math">
+                      <m:sSub>
+                        <m:sSubPr>
+                          <m:ctrlPr>
+                            <a:rPr lang="en-US" altLang="zh-TW" sz="2000" i="1">
+                              <a:latin typeface="Cambria Math" panose="02040503050406030204" pitchFamily="18" charset="0"/>
+                            </a:rPr>
+                          </m:ctrlPr>
+                        </m:sSubPr>
+                        <m:e>
+                          <m:r>
+                            <a:rPr lang="en-US" altLang="zh-TW" sz="2000" i="1">
+                              <a:latin typeface="Cambria Math" panose="02040503050406030204" pitchFamily="18" charset="0"/>
+                            </a:rPr>
+                            <m:t>0.1</m:t>
+                          </m:r>
+                          <m:r>
+                            <a:rPr lang="en-US" altLang="zh-TW" sz="2000" i="1">
+                              <a:latin typeface="Cambria Math" panose="02040503050406030204" pitchFamily="18" charset="0"/>
+                            </a:rPr>
+                            <m:t>𝑄</m:t>
+                          </m:r>
+                        </m:e>
+                        <m:sub>
+                          <m:r>
+                            <a:rPr lang="en-US" altLang="zh-TW" sz="2000" i="1">
+                              <a:latin typeface="Cambria Math" panose="02040503050406030204" pitchFamily="18" charset="0"/>
+                            </a:rPr>
+                            <m:t>𝑐</m:t>
+                          </m:r>
+                        </m:sub>
+                      </m:sSub>
+                    </m:oMath>
+                  </m:oMathPara>
+                </a14:m>
+                <a:endParaRPr lang="en-US" altLang="zh-TW" sz="2000" dirty="0"/>
+              </a:p>
+            </p:txBody>
+          </p:sp>
+        </mc:Choice>
+        <mc:Fallback xmlns="">
+          <p:sp>
+            <p:nvSpPr>
+              <p:cNvPr id="39" name="文字方塊 38">
+                <a:extLst>
+                  <a:ext uri="{FF2B5EF4-FFF2-40B4-BE49-F238E27FC236}">
+                    <a16:creationId xmlns:a16="http://schemas.microsoft.com/office/drawing/2014/main" id="{B2DDAB2F-1594-4FFB-83A0-D06118A518FB}"/>
+                  </a:ext>
+                </a:extLst>
+              </p:cNvPr>
+              <p:cNvSpPr txBox="1">
+                <a:spLocks noRot="1" noChangeAspect="1" noMove="1" noResize="1" noEditPoints="1" noAdjustHandles="1" noChangeArrowheads="1" noChangeShapeType="1" noTextEdit="1"/>
+              </p:cNvSpPr>
+              <p:nvPr/>
+            </p:nvSpPr>
+            <p:spPr>
+              <a:xfrm>
+                <a:off x="5092380" y="1205477"/>
+                <a:ext cx="830594" cy="400110"/>
+              </a:xfrm>
+              <a:prstGeom prst="rect">
+                <a:avLst/>
+              </a:prstGeom>
+              <a:blipFill>
+                <a:blip r:embed="rId4"/>
+                <a:stretch>
+                  <a:fillRect b="-9231"/>
+                </a:stretch>
+              </a:blipFill>
+            </p:spPr>
+            <p:txBody>
+              <a:bodyPr/>
+              <a:lstStyle/>
+              <a:p>
+                <a:r>
+                  <a:rPr lang="zh-TW" altLang="en-US">
+                    <a:noFill/>
+                  </a:rPr>
+                  <a:t> </a:t>
+                </a:r>
+              </a:p>
+            </p:txBody>
+          </p:sp>
+        </mc:Fallback>
+      </mc:AlternateContent>
+      <p:sp>
+        <p:nvSpPr>
+          <p:cNvPr id="40" name="箭號: 向右 39">
+            <a:extLst>
+              <a:ext uri="{FF2B5EF4-FFF2-40B4-BE49-F238E27FC236}">
+                <a16:creationId xmlns:a16="http://schemas.microsoft.com/office/drawing/2014/main" id="{3B26685E-3A51-45E8-BCF7-50D246C56B01}"/>
+              </a:ext>
+            </a:extLst>
+          </p:cNvPr>
+          <p:cNvSpPr/>
+          <p:nvPr/>
+        </p:nvSpPr>
+        <p:spPr>
+          <a:xfrm>
+            <a:off x="5923011" y="857760"/>
+            <a:ext cx="122846" cy="35583"/>
+          </a:xfrm>
+          <a:prstGeom prst="rightArrow">
+            <a:avLst>
+              <a:gd name="adj1" fmla="val 50000"/>
+              <a:gd name="adj2" fmla="val 99023"/>
+            </a:avLst>
+          </a:prstGeom>
+          <a:solidFill>
+            <a:schemeClr val="tx1"/>
+          </a:solidFill>
+          <a:ln>
+            <a:solidFill>
+              <a:schemeClr val="tx1"/>
+            </a:solidFill>
+          </a:ln>
+        </p:spPr>
+        <p:style>
+          <a:lnRef idx="2">
+            <a:schemeClr val="dk1">
+              <a:shade val="50000"/>
+            </a:schemeClr>
+          </a:lnRef>
+          <a:fillRef idx="1">
+            <a:schemeClr val="dk1"/>
+          </a:fillRef>
+          <a:effectRef idx="0">
+            <a:schemeClr val="dk1"/>
+          </a:effectRef>
+          <a:fontRef idx="minor">
+            <a:schemeClr val="lt1"/>
+          </a:fontRef>
+        </p:style>
+        <p:txBody>
+          <a:bodyPr rtlCol="0" anchor="ctr"/>
+          <a:lstStyle/>
+          <a:p>
+            <a:pPr algn="ctr"/>
+            <a:endParaRPr lang="zh-TW" altLang="en-US" sz="2000">
+              <a:solidFill>
+                <a:schemeClr val="tx1"/>
+              </a:solidFill>
+            </a:endParaRPr>
+          </a:p>
+        </p:txBody>
+      </p:sp>
+      <p:sp>
+        <p:nvSpPr>
+          <p:cNvPr id="41" name="箭號: 向右 40">
+            <a:extLst>
+              <a:ext uri="{FF2B5EF4-FFF2-40B4-BE49-F238E27FC236}">
+                <a16:creationId xmlns:a16="http://schemas.microsoft.com/office/drawing/2014/main" id="{7EF8F9B9-3935-41B7-A75F-315D7FC4CED0}"/>
+              </a:ext>
+            </a:extLst>
+          </p:cNvPr>
+          <p:cNvSpPr/>
+          <p:nvPr/>
+        </p:nvSpPr>
+        <p:spPr>
+          <a:xfrm rot="16200000">
+            <a:off x="5871636" y="806243"/>
+            <a:ext cx="118561" cy="36869"/>
+          </a:xfrm>
+          <a:prstGeom prst="rightArrow">
+            <a:avLst>
+              <a:gd name="adj1" fmla="val 50000"/>
+              <a:gd name="adj2" fmla="val 99023"/>
+            </a:avLst>
+          </a:prstGeom>
+          <a:solidFill>
+            <a:schemeClr val="tx1"/>
+          </a:solidFill>
+          <a:ln>
+            <a:solidFill>
+              <a:schemeClr val="tx1"/>
+            </a:solidFill>
+          </a:ln>
+        </p:spPr>
+        <p:style>
+          <a:lnRef idx="2">
+            <a:schemeClr val="dk1">
+              <a:shade val="50000"/>
+            </a:schemeClr>
+          </a:lnRef>
+          <a:fillRef idx="1">
+            <a:schemeClr val="dk1"/>
+          </a:fillRef>
+          <a:effectRef idx="0">
+            <a:schemeClr val="dk1"/>
+          </a:effectRef>
+          <a:fontRef idx="minor">
+            <a:schemeClr val="lt1"/>
+          </a:fontRef>
+        </p:style>
+        <p:txBody>
+          <a:bodyPr rtlCol="0" anchor="ctr"/>
+          <a:lstStyle/>
+          <a:p>
+            <a:pPr algn="ctr"/>
+            <a:endParaRPr lang="zh-TW" altLang="en-US" sz="2000" dirty="0">
+              <a:solidFill>
+                <a:schemeClr val="tx1"/>
+              </a:solidFill>
+            </a:endParaRPr>
+          </a:p>
+        </p:txBody>
+      </p:sp>
+      <mc:AlternateContent xmlns:mc="http://schemas.openxmlformats.org/markup-compatibility/2006" xmlns:a14="http://schemas.microsoft.com/office/drawing/2010/main">
+        <mc:Choice Requires="a14">
+          <p:sp>
+            <p:nvSpPr>
+              <p:cNvPr id="42" name="文字方塊 41">
+                <a:extLst>
+                  <a:ext uri="{FF2B5EF4-FFF2-40B4-BE49-F238E27FC236}">
+                    <a16:creationId xmlns:a16="http://schemas.microsoft.com/office/drawing/2014/main" id="{137B15C9-72BD-475D-9E9A-FB1773735E00}"/>
+                  </a:ext>
+                </a:extLst>
+              </p:cNvPr>
+              <p:cNvSpPr txBox="1"/>
+              <p:nvPr/>
+            </p:nvSpPr>
+            <p:spPr>
+              <a:xfrm>
+                <a:off x="5715053" y="362908"/>
+                <a:ext cx="523462" cy="424283"/>
+              </a:xfrm>
+              <a:prstGeom prst="rect">
+                <a:avLst/>
+              </a:prstGeom>
+              <a:noFill/>
+            </p:spPr>
+            <p:txBody>
+              <a:bodyPr wrap="square" rtlCol="0">
+                <a:spAutoFit/>
+              </a:bodyPr>
+              <a:lstStyle/>
+              <a:p>
+                <a:pPr/>
+                <a14:m>
+                  <m:oMathPara xmlns:m="http://schemas.openxmlformats.org/officeDocument/2006/math">
+                    <m:oMathParaPr>
+                      <m:jc m:val="centerGroup"/>
+                    </m:oMathParaPr>
+                    <m:oMath xmlns:m="http://schemas.openxmlformats.org/officeDocument/2006/math">
+                      <m:sSub>
+                        <m:sSubPr>
+                          <m:ctrlPr>
+                            <a:rPr lang="en-US" altLang="zh-TW" sz="2000" i="1">
+                              <a:latin typeface="Cambria Math" panose="02040503050406030204" pitchFamily="18" charset="0"/>
+                            </a:rPr>
+                          </m:ctrlPr>
+                        </m:sSubPr>
+                        <m:e>
+                          <m:r>
+                            <a:rPr lang="en-US" altLang="zh-TW" sz="2000" i="1">
+                              <a:latin typeface="Cambria Math" panose="02040503050406030204" pitchFamily="18" charset="0"/>
+                            </a:rPr>
+                            <m:t>𝑄</m:t>
+                          </m:r>
+                        </m:e>
+                        <m:sub>
+                          <m:r>
+                            <a:rPr lang="en-US" altLang="zh-TW" sz="2000" i="1">
+                              <a:latin typeface="Cambria Math" panose="02040503050406030204" pitchFamily="18" charset="0"/>
+                            </a:rPr>
+                            <m:t>𝑦</m:t>
+                          </m:r>
+                        </m:sub>
+                      </m:sSub>
+                    </m:oMath>
+                  </m:oMathPara>
+                </a14:m>
+                <a:endParaRPr lang="en-US" altLang="zh-TW" sz="2000" dirty="0"/>
+              </a:p>
+            </p:txBody>
+          </p:sp>
+        </mc:Choice>
+        <mc:Fallback xmlns="">
+          <p:sp>
+            <p:nvSpPr>
+              <p:cNvPr id="42" name="文字方塊 41">
+                <a:extLst>
+                  <a:ext uri="{FF2B5EF4-FFF2-40B4-BE49-F238E27FC236}">
+                    <a16:creationId xmlns:a16="http://schemas.microsoft.com/office/drawing/2014/main" id="{137B15C9-72BD-475D-9E9A-FB1773735E00}"/>
+                  </a:ext>
+                </a:extLst>
+              </p:cNvPr>
+              <p:cNvSpPr txBox="1">
+                <a:spLocks noRot="1" noChangeAspect="1" noMove="1" noResize="1" noEditPoints="1" noAdjustHandles="1" noChangeArrowheads="1" noChangeShapeType="1" noTextEdit="1"/>
+              </p:cNvSpPr>
+              <p:nvPr/>
+            </p:nvSpPr>
+            <p:spPr>
+              <a:xfrm>
+                <a:off x="5715053" y="362908"/>
+                <a:ext cx="523462" cy="424283"/>
+              </a:xfrm>
+              <a:prstGeom prst="rect">
+                <a:avLst/>
+              </a:prstGeom>
+              <a:blipFill>
+                <a:blip r:embed="rId5"/>
+                <a:stretch>
+                  <a:fillRect b="-5797"/>
+                </a:stretch>
+              </a:blipFill>
+            </p:spPr>
+            <p:txBody>
+              <a:bodyPr/>
+              <a:lstStyle/>
+              <a:p>
+                <a:r>
+                  <a:rPr lang="zh-TW" altLang="en-US">
+                    <a:noFill/>
+                  </a:rPr>
+                  <a:t> </a:t>
+                </a:r>
+              </a:p>
+            </p:txBody>
+          </p:sp>
+        </mc:Fallback>
+      </mc:AlternateContent>
+      <mc:AlternateContent xmlns:mc="http://schemas.openxmlformats.org/markup-compatibility/2006" xmlns:a14="http://schemas.microsoft.com/office/drawing/2010/main">
+        <mc:Choice Requires="a14">
+          <p:sp>
+            <p:nvSpPr>
+              <p:cNvPr id="43" name="文字方塊 42">
+                <a:extLst>
+                  <a:ext uri="{FF2B5EF4-FFF2-40B4-BE49-F238E27FC236}">
+                    <a16:creationId xmlns:a16="http://schemas.microsoft.com/office/drawing/2014/main" id="{AEF72226-30F7-485F-9029-D1D49AEF1D4B}"/>
+                  </a:ext>
+                </a:extLst>
+              </p:cNvPr>
+              <p:cNvSpPr txBox="1"/>
+              <p:nvPr/>
+            </p:nvSpPr>
+            <p:spPr>
+              <a:xfrm>
+                <a:off x="5987180" y="674065"/>
+                <a:ext cx="394126" cy="400110"/>
+              </a:xfrm>
+              <a:prstGeom prst="rect">
+                <a:avLst/>
+              </a:prstGeom>
+              <a:noFill/>
+            </p:spPr>
+            <p:txBody>
+              <a:bodyPr wrap="square" rtlCol="0">
+                <a:spAutoFit/>
+              </a:bodyPr>
+              <a:lstStyle/>
+              <a:p>
+                <a:pPr/>
+                <a14:m>
+                  <m:oMathPara xmlns:m="http://schemas.openxmlformats.org/officeDocument/2006/math">
+                    <m:oMathParaPr>
+                      <m:jc m:val="centerGroup"/>
+                    </m:oMathParaPr>
+                    <m:oMath xmlns:m="http://schemas.openxmlformats.org/officeDocument/2006/math">
+                      <m:sSub>
+                        <m:sSubPr>
+                          <m:ctrlPr>
+                            <a:rPr lang="en-US" altLang="zh-TW" sz="2000" i="1">
+                              <a:latin typeface="Cambria Math" panose="02040503050406030204" pitchFamily="18" charset="0"/>
+                            </a:rPr>
+                          </m:ctrlPr>
+                        </m:sSubPr>
+                        <m:e>
+                          <m:r>
+                            <a:rPr lang="en-US" altLang="zh-TW" sz="2000" i="1">
+                              <a:latin typeface="Cambria Math" panose="02040503050406030204" pitchFamily="18" charset="0"/>
+                            </a:rPr>
+                            <m:t>𝑄</m:t>
+                          </m:r>
+                        </m:e>
+                        <m:sub>
+                          <m:r>
+                            <a:rPr lang="en-US" altLang="zh-TW" sz="2000" i="1">
+                              <a:latin typeface="Cambria Math" panose="02040503050406030204" pitchFamily="18" charset="0"/>
+                            </a:rPr>
+                            <m:t>𝑥</m:t>
+                          </m:r>
+                        </m:sub>
+                      </m:sSub>
+                    </m:oMath>
+                  </m:oMathPara>
+                </a14:m>
+                <a:endParaRPr lang="en-US" altLang="zh-TW" sz="2000" dirty="0"/>
+              </a:p>
+            </p:txBody>
+          </p:sp>
+        </mc:Choice>
+        <mc:Fallback xmlns="">
+          <p:sp>
+            <p:nvSpPr>
+              <p:cNvPr id="43" name="文字方塊 42">
+                <a:extLst>
+                  <a:ext uri="{FF2B5EF4-FFF2-40B4-BE49-F238E27FC236}">
+                    <a16:creationId xmlns:a16="http://schemas.microsoft.com/office/drawing/2014/main" id="{AEF72226-30F7-485F-9029-D1D49AEF1D4B}"/>
+                  </a:ext>
+                </a:extLst>
+              </p:cNvPr>
+              <p:cNvSpPr txBox="1">
+                <a:spLocks noRot="1" noChangeAspect="1" noMove="1" noResize="1" noEditPoints="1" noAdjustHandles="1" noChangeArrowheads="1" noChangeShapeType="1" noTextEdit="1"/>
+              </p:cNvSpPr>
+              <p:nvPr/>
+            </p:nvSpPr>
+            <p:spPr>
+              <a:xfrm>
+                <a:off x="5987180" y="674065"/>
+                <a:ext cx="394126" cy="400110"/>
+              </a:xfrm>
+              <a:prstGeom prst="rect">
+                <a:avLst/>
+              </a:prstGeom>
+              <a:blipFill>
+                <a:blip r:embed="rId6"/>
+                <a:stretch>
+                  <a:fillRect l="-4615" r="-4615" b="-9231"/>
+                </a:stretch>
+              </a:blipFill>
+            </p:spPr>
+            <p:txBody>
+              <a:bodyPr/>
+              <a:lstStyle/>
+              <a:p>
+                <a:r>
+                  <a:rPr lang="zh-TW" altLang="en-US">
+                    <a:noFill/>
+                  </a:rPr>
+                  <a:t> </a:t>
+                </a:r>
+              </a:p>
+            </p:txBody>
+          </p:sp>
+        </mc:Fallback>
+      </mc:AlternateContent>
+      <p:pic>
+        <p:nvPicPr>
+          <p:cNvPr id="10" name="圖形 9">
+            <a:extLst>
+              <a:ext uri="{FF2B5EF4-FFF2-40B4-BE49-F238E27FC236}">
+                <a16:creationId xmlns:a16="http://schemas.microsoft.com/office/drawing/2014/main" id="{4AD1DC5A-0DA6-495E-85D9-2975DAF1F2C3}"/>
+              </a:ext>
+            </a:extLst>
+          </p:cNvPr>
+          <p:cNvPicPr>
+            <a:picLocks noChangeAspect="1"/>
+          </p:cNvPicPr>
+          <p:nvPr/>
+        </p:nvPicPr>
+        <p:blipFill>
+          <a:blip r:embed="rId7">
+            <a:extLst>
+              <a:ext uri="{28A0092B-C50C-407E-A947-70E740481C1C}">
+                <a14:useLocalDpi xmlns:a14="http://schemas.microsoft.com/office/drawing/2010/main" val="0"/>
+              </a:ext>
+              <a:ext uri="{96DAC541-7B7A-43D3-8B79-37D633B846F1}">
+                <asvg:svgBlip xmlns:asvg="http://schemas.microsoft.com/office/drawing/2016/SVG/main" r:embed="rId8"/>
+              </a:ext>
+            </a:extLst>
+          </a:blip>
+          <a:stretch>
+            <a:fillRect/>
+          </a:stretch>
+        </p:blipFill>
+        <p:spPr>
+          <a:xfrm>
+            <a:off x="3307262" y="565079"/>
+            <a:ext cx="1587912" cy="628185"/>
+          </a:xfrm>
+          <a:prstGeom prst="rect">
+            <a:avLst/>
+          </a:prstGeom>
+        </p:spPr>
+      </p:pic>
+    </p:spTree>
+    <p:extLst>
+      <p:ext uri="{BB962C8B-B14F-4D97-AF65-F5344CB8AC3E}">
+        <p14:creationId xmlns:p14="http://schemas.microsoft.com/office/powerpoint/2010/main" val="723472905"/>
       </p:ext>
     </p:extLst>
   </p:cSld>
